--- a/Employee_Records_System_Presentation.pptx
+++ b/Employee_Records_System_Presentation.pptx
@@ -20,6 +20,7 @@
     <p:sldId id="268" r:id="rId19"/>
     <p:sldId id="269" r:id="rId20"/>
     <p:sldId id="270" r:id="rId21"/>
+    <p:sldId id="271" r:id="rId22"/>
   </p:sldIdLst>
   <p:sldSz cx="12191695" cy="6858000" type="screen4x3"/>
   <p:notesSz cx="6858000" cy="9144000"/>
@@ -3112,7 +3113,50 @@
       <p:grpSpPr/>
       <p:sp>
         <p:nvSpPr>
-          <p:cNvPr id="2" name="TextBox 1"/>
+          <p:cNvPr id="2" name="Rounded Rectangle 1"/>
+          <p:cNvSpPr/>
+          <p:nvPr/>
+        </p:nvSpPr>
+        <p:spPr>
+          <a:xfrm>
+            <a:off x="0" y="0"/>
+            <a:ext cx="12191695" cy="137160"/>
+          </a:xfrm>
+          <a:prstGeom prst="roundRect">
+            <a:avLst/>
+          </a:prstGeom>
+          <a:solidFill>
+            <a:srgbClr val="1A56DB"/>
+          </a:solidFill>
+          <a:ln>
+            <a:noFill/>
+          </a:ln>
+        </p:spPr>
+        <p:style>
+          <a:lnRef idx="1">
+            <a:schemeClr val="accent1"/>
+          </a:lnRef>
+          <a:fillRef idx="3">
+            <a:schemeClr val="accent1"/>
+          </a:fillRef>
+          <a:effectRef idx="2">
+            <a:schemeClr val="accent1"/>
+          </a:effectRef>
+          <a:fontRef idx="minor">
+            <a:schemeClr val="lt1"/>
+          </a:fontRef>
+        </p:style>
+        <p:txBody>
+          <a:bodyPr rtlCol="0" anchor="ctr"/>
+          <a:lstStyle/>
+          <a:p>
+            <a:pPr algn="ctr"/>
+          </a:p>
+        </p:txBody>
+      </p:sp>
+      <p:sp>
+        <p:nvSpPr>
+          <p:cNvPr id="3" name="TextBox 2"/>
           <p:cNvSpPr txBox="1"/>
           <p:nvPr/>
         </p:nvSpPr>
@@ -3148,13 +3192,56 @@
       </p:sp>
       <p:sp>
         <p:nvSpPr>
-          <p:cNvPr id="3" name="TextBox 2"/>
+          <p:cNvPr id="4" name="Rectangle 3"/>
+          <p:cNvSpPr/>
+          <p:nvPr/>
+        </p:nvSpPr>
+        <p:spPr>
+          <a:xfrm>
+            <a:off x="4114800" y="2834640"/>
+            <a:ext cx="3931920" cy="38100"/>
+          </a:xfrm>
+          <a:prstGeom prst="rect">
+            <a:avLst/>
+          </a:prstGeom>
+          <a:solidFill>
+            <a:srgbClr val="1A56DB"/>
+          </a:solidFill>
+          <a:ln>
+            <a:noFill/>
+          </a:ln>
+        </p:spPr>
+        <p:style>
+          <a:lnRef idx="1">
+            <a:schemeClr val="accent1"/>
+          </a:lnRef>
+          <a:fillRef idx="3">
+            <a:schemeClr val="accent1"/>
+          </a:fillRef>
+          <a:effectRef idx="2">
+            <a:schemeClr val="accent1"/>
+          </a:effectRef>
+          <a:fontRef idx="minor">
+            <a:schemeClr val="lt1"/>
+          </a:fontRef>
+        </p:style>
+        <p:txBody>
+          <a:bodyPr rtlCol="0" anchor="ctr"/>
+          <a:lstStyle/>
+          <a:p>
+            <a:pPr algn="ctr"/>
+          </a:p>
+        </p:txBody>
+      </p:sp>
+      <p:sp>
+        <p:nvSpPr>
+          <p:cNvPr id="5" name="TextBox 4"/>
           <p:cNvSpPr txBox="1"/>
           <p:nvPr/>
         </p:nvSpPr>
         <p:spPr>
           <a:xfrm>
-            <a:off x="914400" y="2926080"/>
+            <a:off x="914400" y="3108960"/>
             <a:ext cx="10058400" cy="731520"/>
           </a:xfrm>
           <a:prstGeom prst="rect">
@@ -3177,20 +3264,20 @@
               </a:defRPr>
             </a:pPr>
             <a:r>
-              <a:t>A Python CLI Application for Tracking Weekly Employee Metrics</a:t>
-            </a:r>
-          </a:p>
-        </p:txBody>
-      </p:sp>
-      <p:sp>
-        <p:nvSpPr>
-          <p:cNvPr id="4" name="TextBox 3"/>
+              <a:t>Python CLI  |  SQLite Database  |  Matplotlib Charts</a:t>
+            </a:r>
+          </a:p>
+        </p:txBody>
+      </p:sp>
+      <p:sp>
+        <p:nvSpPr>
+          <p:cNvPr id="6" name="TextBox 5"/>
           <p:cNvSpPr txBox="1"/>
           <p:nvPr/>
         </p:nvSpPr>
         <p:spPr>
           <a:xfrm>
-            <a:off x="914400" y="4114800"/>
+            <a:off x="914400" y="4206240"/>
             <a:ext cx="10058400" cy="548640"/>
           </a:xfrm>
           <a:prstGeom prst="rect">
@@ -3275,14 +3362,57 @@
               </a:defRPr>
             </a:pPr>
             <a:r>
-              <a:t>Demo — Bar Chart Visualization</a:t>
-            </a:r>
+              <a:t>Demo — Search by Name</a:t>
+            </a:r>
+          </a:p>
+        </p:txBody>
+      </p:sp>
+      <p:sp>
+        <p:nvSpPr>
+          <p:cNvPr id="3" name="Rectangle 2"/>
+          <p:cNvSpPr/>
+          <p:nvPr/>
+        </p:nvSpPr>
+        <p:spPr>
+          <a:xfrm>
+            <a:off x="731520" y="1097280"/>
+            <a:ext cx="2743200" cy="38100"/>
+          </a:xfrm>
+          <a:prstGeom prst="rect">
+            <a:avLst/>
+          </a:prstGeom>
+          <a:solidFill>
+            <a:srgbClr val="1A56DB"/>
+          </a:solidFill>
+          <a:ln>
+            <a:noFill/>
+          </a:ln>
+        </p:spPr>
+        <p:style>
+          <a:lnRef idx="1">
+            <a:schemeClr val="accent1"/>
+          </a:lnRef>
+          <a:fillRef idx="3">
+            <a:schemeClr val="accent1"/>
+          </a:fillRef>
+          <a:effectRef idx="2">
+            <a:schemeClr val="accent1"/>
+          </a:effectRef>
+          <a:fontRef idx="minor">
+            <a:schemeClr val="lt1"/>
+          </a:fontRef>
+        </p:style>
+        <p:txBody>
+          <a:bodyPr rtlCol="0" anchor="ctr"/>
+          <a:lstStyle/>
+          <a:p>
+            <a:pPr algn="ctr"/>
           </a:p>
         </p:txBody>
       </p:sp>
       <p:pic>
         <p:nvPicPr>
-          <p:cNvPr id="3" name="Picture 2" descr="Screenshot 2026-04-20 at 00.25.41.png"/>
+          <p:cNvPr id="4" name="Picture 3" descr="Screenshot 2026-04-20 at 00.25.17.png"/>
           <p:cNvPicPr>
             <a:picLocks noChangeAspect="1"/>
           </p:cNvPicPr>
@@ -3361,233 +3491,78 @@
               </a:defRPr>
             </a:pPr>
             <a:r>
-              <a:t>Challenges &amp; Lessons Learned</a:t>
-            </a:r>
-          </a:p>
-        </p:txBody>
-      </p:sp>
-      <p:sp>
-        <p:nvSpPr>
-          <p:cNvPr id="3" name="TextBox 2"/>
-          <p:cNvSpPr txBox="1"/>
-          <p:nvPr/>
-        </p:nvSpPr>
-        <p:spPr>
-          <a:xfrm>
-            <a:off x="731520" y="1645920"/>
-            <a:ext cx="5029200" cy="4572000"/>
+              <a:t>Demo — Bar Chart Visualization</a:t>
+            </a:r>
+          </a:p>
+        </p:txBody>
+      </p:sp>
+      <p:sp>
+        <p:nvSpPr>
+          <p:cNvPr id="3" name="Rectangle 2"/>
+          <p:cNvSpPr/>
+          <p:nvPr/>
+        </p:nvSpPr>
+        <p:spPr>
+          <a:xfrm>
+            <a:off x="731520" y="1097280"/>
+            <a:ext cx="4114800" cy="38100"/>
           </a:xfrm>
           <a:prstGeom prst="rect">
             <a:avLst/>
           </a:prstGeom>
-          <a:noFill/>
-        </p:spPr>
-        <p:txBody>
-          <a:bodyPr wrap="square">
-            <a:spAutoFit/>
-          </a:bodyPr>
-          <a:lstStyle/>
-          <a:p>
-            <a:pPr>
-              <a:spcAft>
-                <a:spcPts val="800"/>
-              </a:spcAft>
-              <a:defRPr sz="1800">
-                <a:solidFill>
-                  <a:srgbClr val="C0392B"/>
-                </a:solidFill>
-                <a:latin typeface="Calibri"/>
-              </a:defRPr>
-            </a:pPr>
-            <a:r>
-              <a:t>Challenges</a:t>
-            </a:r>
-          </a:p>
-          <a:p>
-            <a:pPr>
-              <a:spcAft>
-                <a:spcPts val="800"/>
-              </a:spcAft>
-              <a:defRPr sz="1800">
-                <a:solidFill>
-                  <a:srgbClr val="C0392B"/>
-                </a:solidFill>
-                <a:latin typeface="Calibri"/>
-              </a:defRPr>
-            </a:pPr>
-            <a:r>
-              <a:t>  • Generating unique color shades per employee</a:t>
-            </a:r>
-          </a:p>
-          <a:p>
-            <a:pPr>
-              <a:spcAft>
-                <a:spcPts val="800"/>
-              </a:spcAft>
-              <a:defRPr sz="1800">
-                <a:solidFill>
-                  <a:srgbClr val="C0392B"/>
-                </a:solidFill>
-                <a:latin typeface="Calibri"/>
-              </a:defRPr>
-            </a:pPr>
-            <a:r>
-              <a:t>  • Aligning terminal bar chart with Unicode characters</a:t>
-            </a:r>
-          </a:p>
-          <a:p>
-            <a:pPr>
-              <a:spcAft>
-                <a:spcPts val="800"/>
-              </a:spcAft>
-              <a:defRPr sz="1800">
-                <a:solidFill>
-                  <a:srgbClr val="C0392B"/>
-                </a:solidFill>
-                <a:latin typeface="Calibri"/>
-              </a:defRPr>
-            </a:pPr>
-            <a:r>
-              <a:t>  • Handling edge cases in user input</a:t>
-            </a:r>
-          </a:p>
-          <a:p>
-            <a:pPr>
-              <a:spcAft>
-                <a:spcPts val="800"/>
-              </a:spcAft>
-              <a:defRPr sz="1800">
-                <a:solidFill>
-                  <a:srgbClr val="C0392B"/>
-                </a:solidFill>
-                <a:latin typeface="Calibri"/>
-              </a:defRPr>
-            </a:pPr>
-            <a:r>
-              <a:t>  • Keeping code organized as features grew</a:t>
-            </a:r>
-          </a:p>
-        </p:txBody>
-      </p:sp>
-      <p:sp>
-        <p:nvSpPr>
-          <p:cNvPr id="4" name="TextBox 3"/>
-          <p:cNvSpPr txBox="1"/>
-          <p:nvPr/>
-        </p:nvSpPr>
-        <p:spPr>
-          <a:xfrm>
-            <a:off x="5943600" y="1645920"/>
-            <a:ext cx="5486400" cy="4572000"/>
+          <a:solidFill>
+            <a:srgbClr val="1A56DB"/>
+          </a:solidFill>
+          <a:ln>
+            <a:noFill/>
+          </a:ln>
+        </p:spPr>
+        <p:style>
+          <a:lnRef idx="1">
+            <a:schemeClr val="accent1"/>
+          </a:lnRef>
+          <a:fillRef idx="3">
+            <a:schemeClr val="accent1"/>
+          </a:fillRef>
+          <a:effectRef idx="2">
+            <a:schemeClr val="accent1"/>
+          </a:effectRef>
+          <a:fontRef idx="minor">
+            <a:schemeClr val="lt1"/>
+          </a:fontRef>
+        </p:style>
+        <p:txBody>
+          <a:bodyPr rtlCol="0" anchor="ctr"/>
+          <a:lstStyle/>
+          <a:p>
+            <a:pPr algn="ctr"/>
+          </a:p>
+        </p:txBody>
+      </p:sp>
+      <p:pic>
+        <p:nvPicPr>
+          <p:cNvPr id="4" name="Picture 3" descr="Screenshot 2026-04-20 at 00.25.41.png"/>
+          <p:cNvPicPr>
+            <a:picLocks noChangeAspect="1"/>
+          </p:cNvPicPr>
+          <p:nvPr/>
+        </p:nvPicPr>
+        <p:blipFill>
+          <a:blip r:embed="rId2"/>
+          <a:stretch>
+            <a:fillRect/>
+          </a:stretch>
+        </p:blipFill>
+        <p:spPr>
+          <a:xfrm>
+            <a:off x="1371600" y="1463040"/>
+            <a:ext cx="9418320" cy="5029200"/>
           </a:xfrm>
           <a:prstGeom prst="rect">
             <a:avLst/>
           </a:prstGeom>
-          <a:noFill/>
-        </p:spPr>
-        <p:txBody>
-          <a:bodyPr wrap="square">
-            <a:spAutoFit/>
-          </a:bodyPr>
-          <a:lstStyle/>
-          <a:p>
-            <a:pPr>
-              <a:spcAft>
-                <a:spcPts val="800"/>
-              </a:spcAft>
-              <a:defRPr sz="1800">
-                <a:solidFill>
-                  <a:srgbClr val="167F3D"/>
-                </a:solidFill>
-                <a:latin typeface="Calibri"/>
-              </a:defRPr>
-            </a:pPr>
-            <a:r>
-              <a:t>Lessons Learned</a:t>
-            </a:r>
-          </a:p>
-          <a:p>
-            <a:pPr>
-              <a:spcAft>
-                <a:spcPts val="800"/>
-              </a:spcAft>
-              <a:defRPr sz="1800">
-                <a:solidFill>
-                  <a:srgbClr val="167F3D"/>
-                </a:solidFill>
-                <a:latin typeface="Calibri"/>
-              </a:defRPr>
-            </a:pPr>
-            <a:r>
-              <a:t>  • Breaking code into small focused functions</a:t>
-            </a:r>
-          </a:p>
-          <a:p>
-            <a:pPr>
-              <a:spcAft>
-                <a:spcPts val="800"/>
-              </a:spcAft>
-              <a:defRPr sz="1800">
-                <a:solidFill>
-                  <a:srgbClr val="167F3D"/>
-                </a:solidFill>
-                <a:latin typeface="Calibri"/>
-              </a:defRPr>
-            </a:pPr>
-            <a:r>
-              <a:t>  • Input validation prevents crashes</a:t>
-            </a:r>
-          </a:p>
-          <a:p>
-            <a:pPr>
-              <a:spcAft>
-                <a:spcPts val="800"/>
-              </a:spcAft>
-              <a:defRPr sz="1800">
-                <a:solidFill>
-                  <a:srgbClr val="167F3D"/>
-                </a:solidFill>
-                <a:latin typeface="Calibri"/>
-              </a:defRPr>
-            </a:pPr>
-            <a:r>
-              <a:t>  • f-strings make formatting clean and readable</a:t>
-            </a:r>
-          </a:p>
-          <a:p>
-            <a:pPr>
-              <a:spcAft>
-                <a:spcPts val="800"/>
-              </a:spcAft>
-              <a:defRPr sz="1800">
-                <a:solidFill>
-                  <a:srgbClr val="167F3D"/>
-                </a:solidFill>
-                <a:latin typeface="Calibri"/>
-              </a:defRPr>
-            </a:pPr>
-            <a:r>
-              <a:t>  • matplotlib is powerful for quick visualizations</a:t>
-            </a:r>
-          </a:p>
-          <a:p>
-            <a:pPr>
-              <a:spcAft>
-                <a:spcPts val="800"/>
-              </a:spcAft>
-              <a:defRPr sz="1800">
-                <a:solidFill>
-                  <a:srgbClr val="167F3D"/>
-                </a:solidFill>
-                <a:latin typeface="Calibri"/>
-              </a:defRPr>
-            </a:pPr>
-            <a:r>
-              <a:t>  • Unit testing catches bugs early</a:t>
-            </a:r>
-          </a:p>
-        </p:txBody>
-      </p:sp>
+        </p:spPr>
+      </p:pic>
     </p:spTree>
   </p:cSld>
   <p:clrMapOvr>
@@ -3645,21 +3620,145 @@
               </a:defRPr>
             </a:pPr>
             <a:r>
-              <a:t>Future Improvements</a:t>
-            </a:r>
-          </a:p>
-        </p:txBody>
-      </p:sp>
-      <p:sp>
-        <p:nvSpPr>
-          <p:cNvPr id="3" name="TextBox 2"/>
+              <a:t>Challenges &amp; Lessons Learned</a:t>
+            </a:r>
+          </a:p>
+        </p:txBody>
+      </p:sp>
+      <p:sp>
+        <p:nvSpPr>
+          <p:cNvPr id="3" name="Rectangle 2"/>
+          <p:cNvSpPr/>
+          <p:nvPr/>
+        </p:nvSpPr>
+        <p:spPr>
+          <a:xfrm>
+            <a:off x="731520" y="1097280"/>
+            <a:ext cx="4114800" cy="38100"/>
+          </a:xfrm>
+          <a:prstGeom prst="rect">
+            <a:avLst/>
+          </a:prstGeom>
+          <a:solidFill>
+            <a:srgbClr val="1A56DB"/>
+          </a:solidFill>
+          <a:ln>
+            <a:noFill/>
+          </a:ln>
+        </p:spPr>
+        <p:style>
+          <a:lnRef idx="1">
+            <a:schemeClr val="accent1"/>
+          </a:lnRef>
+          <a:fillRef idx="3">
+            <a:schemeClr val="accent1"/>
+          </a:fillRef>
+          <a:effectRef idx="2">
+            <a:schemeClr val="accent1"/>
+          </a:effectRef>
+          <a:fontRef idx="minor">
+            <a:schemeClr val="lt1"/>
+          </a:fontRef>
+        </p:style>
+        <p:txBody>
+          <a:bodyPr rtlCol="0" anchor="ctr"/>
+          <a:lstStyle/>
+          <a:p>
+            <a:pPr algn="ctr"/>
+          </a:p>
+        </p:txBody>
+      </p:sp>
+      <p:sp>
+        <p:nvSpPr>
+          <p:cNvPr id="4" name="Rounded Rectangle 3"/>
+          <p:cNvSpPr/>
+          <p:nvPr/>
+        </p:nvSpPr>
+        <p:spPr>
+          <a:xfrm>
+            <a:off x="731520" y="1463040"/>
+            <a:ext cx="5029200" cy="4114800"/>
+          </a:xfrm>
+          <a:prstGeom prst="roundRect">
+            <a:avLst/>
+          </a:prstGeom>
+          <a:solidFill>
+            <a:srgbClr val="FDEDED"/>
+          </a:solidFill>
+          <a:ln w="19050">
+            <a:solidFill>
+              <a:srgbClr val="C0392B"/>
+            </a:solidFill>
+          </a:ln>
+        </p:spPr>
+        <p:style>
+          <a:lnRef idx="1">
+            <a:schemeClr val="accent1"/>
+          </a:lnRef>
+          <a:fillRef idx="3">
+            <a:schemeClr val="accent1"/>
+          </a:fillRef>
+          <a:effectRef idx="2">
+            <a:schemeClr val="accent1"/>
+          </a:effectRef>
+          <a:fontRef idx="minor">
+            <a:schemeClr val="lt1"/>
+          </a:fontRef>
+        </p:style>
+        <p:txBody>
+          <a:bodyPr rtlCol="0" anchor="ctr"/>
+          <a:lstStyle/>
+          <a:p>
+            <a:pPr algn="ctr"/>
+          </a:p>
+        </p:txBody>
+      </p:sp>
+      <p:sp>
+        <p:nvSpPr>
+          <p:cNvPr id="5" name="TextBox 4"/>
           <p:cNvSpPr txBox="1"/>
           <p:nvPr/>
         </p:nvSpPr>
         <p:spPr>
           <a:xfrm>
-            <a:off x="731520" y="1645920"/>
-            <a:ext cx="10058400" cy="4114800"/>
+            <a:off x="1005840" y="1645920"/>
+            <a:ext cx="4114800" cy="457200"/>
+          </a:xfrm>
+          <a:prstGeom prst="rect">
+            <a:avLst/>
+          </a:prstGeom>
+          <a:noFill/>
+        </p:spPr>
+        <p:txBody>
+          <a:bodyPr wrap="square">
+            <a:spAutoFit/>
+          </a:bodyPr>
+          <a:lstStyle/>
+          <a:p>
+            <a:pPr algn="l">
+              <a:defRPr sz="2200" b="1">
+                <a:solidFill>
+                  <a:srgbClr val="C0392B"/>
+                </a:solidFill>
+                <a:latin typeface="Calibri"/>
+              </a:defRPr>
+            </a:pPr>
+            <a:r>
+              <a:t>Challenges</a:t>
+            </a:r>
+          </a:p>
+        </p:txBody>
+      </p:sp>
+      <p:sp>
+        <p:nvSpPr>
+          <p:cNvPr id="6" name="TextBox 5"/>
+          <p:cNvSpPr txBox="1"/>
+          <p:nvPr/>
+        </p:nvSpPr>
+        <p:spPr>
+          <a:xfrm>
+            <a:off x="1005840" y="2286000"/>
+            <a:ext cx="4480560" cy="2926080"/>
           </a:xfrm>
           <a:prstGeom prst="rect">
             <a:avLst/>
@@ -3676,7 +3775,7 @@
               <a:spcAft>
                 <a:spcPts val="800"/>
               </a:spcAft>
-              <a:defRPr sz="2000">
+              <a:defRPr sz="1700">
                 <a:solidFill>
                   <a:srgbClr val="333333"/>
                 </a:solidFill>
@@ -3684,7 +3783,7 @@
               </a:defRPr>
             </a:pPr>
             <a:r>
-              <a:t>• SQLite database for persistent storage</a:t>
+              <a:t>• Unique color shades per employee</a:t>
             </a:r>
           </a:p>
           <a:p>
@@ -3692,7 +3791,7 @@
               <a:spcAft>
                 <a:spcPts val="800"/>
               </a:spcAft>
-              <a:defRPr sz="2000">
+              <a:defRPr sz="1700">
                 <a:solidFill>
                   <a:srgbClr val="333333"/>
                 </a:solidFill>
@@ -3700,7 +3799,7 @@
               </a:defRPr>
             </a:pPr>
             <a:r>
-              <a:t>• Export records to CSV, TXT, PDF, and Excel</a:t>
+              <a:t>• Unicode bar chart alignment</a:t>
             </a:r>
           </a:p>
           <a:p>
@@ -3708,7 +3807,7 @@
               <a:spcAft>
                 <a:spcPts val="800"/>
               </a:spcAft>
-              <a:defRPr sz="2000">
+              <a:defRPr sz="1700">
                 <a:solidFill>
                   <a:srgbClr val="333333"/>
                 </a:solidFill>
@@ -3716,7 +3815,191 @@
               </a:defRPr>
             </a:pPr>
             <a:r>
-              <a:t>• Support custom departments via configuration</a:t>
+              <a:t>• Edge cases in user input</a:t>
+            </a:r>
+          </a:p>
+          <a:p>
+            <a:pPr>
+              <a:spcAft>
+                <a:spcPts val="800"/>
+              </a:spcAft>
+              <a:defRPr sz="1700">
+                <a:solidFill>
+                  <a:srgbClr val="333333"/>
+                </a:solidFill>
+                <a:latin typeface="Calibri"/>
+              </a:defRPr>
+            </a:pPr>
+            <a:r>
+              <a:t>• Organizing code across modules</a:t>
+            </a:r>
+          </a:p>
+        </p:txBody>
+      </p:sp>
+      <p:sp>
+        <p:nvSpPr>
+          <p:cNvPr id="7" name="Rounded Rectangle 6"/>
+          <p:cNvSpPr/>
+          <p:nvPr/>
+        </p:nvSpPr>
+        <p:spPr>
+          <a:xfrm>
+            <a:off x="6217920" y="1463040"/>
+            <a:ext cx="5212080" cy="4114800"/>
+          </a:xfrm>
+          <a:prstGeom prst="roundRect">
+            <a:avLst/>
+          </a:prstGeom>
+          <a:solidFill>
+            <a:srgbClr val="E6F4EA"/>
+          </a:solidFill>
+          <a:ln w="19050">
+            <a:solidFill>
+              <a:srgbClr val="167F3D"/>
+            </a:solidFill>
+          </a:ln>
+        </p:spPr>
+        <p:style>
+          <a:lnRef idx="1">
+            <a:schemeClr val="accent1"/>
+          </a:lnRef>
+          <a:fillRef idx="3">
+            <a:schemeClr val="accent1"/>
+          </a:fillRef>
+          <a:effectRef idx="2">
+            <a:schemeClr val="accent1"/>
+          </a:effectRef>
+          <a:fontRef idx="minor">
+            <a:schemeClr val="lt1"/>
+          </a:fontRef>
+        </p:style>
+        <p:txBody>
+          <a:bodyPr rtlCol="0" anchor="ctr"/>
+          <a:lstStyle/>
+          <a:p>
+            <a:pPr algn="ctr"/>
+          </a:p>
+        </p:txBody>
+      </p:sp>
+      <p:sp>
+        <p:nvSpPr>
+          <p:cNvPr id="8" name="TextBox 7"/>
+          <p:cNvSpPr txBox="1"/>
+          <p:nvPr/>
+        </p:nvSpPr>
+        <p:spPr>
+          <a:xfrm>
+            <a:off x="6492240" y="1645920"/>
+            <a:ext cx="4114800" cy="457200"/>
+          </a:xfrm>
+          <a:prstGeom prst="rect">
+            <a:avLst/>
+          </a:prstGeom>
+          <a:noFill/>
+        </p:spPr>
+        <p:txBody>
+          <a:bodyPr wrap="square">
+            <a:spAutoFit/>
+          </a:bodyPr>
+          <a:lstStyle/>
+          <a:p>
+            <a:pPr algn="l">
+              <a:defRPr sz="2200" b="1">
+                <a:solidFill>
+                  <a:srgbClr val="167F3D"/>
+                </a:solidFill>
+                <a:latin typeface="Calibri"/>
+              </a:defRPr>
+            </a:pPr>
+            <a:r>
+              <a:t>Lessons Learned</a:t>
+            </a:r>
+          </a:p>
+        </p:txBody>
+      </p:sp>
+      <p:sp>
+        <p:nvSpPr>
+          <p:cNvPr id="9" name="TextBox 8"/>
+          <p:cNvSpPr txBox="1"/>
+          <p:nvPr/>
+        </p:nvSpPr>
+        <p:spPr>
+          <a:xfrm>
+            <a:off x="6492240" y="2286000"/>
+            <a:ext cx="4663440" cy="2926080"/>
+          </a:xfrm>
+          <a:prstGeom prst="rect">
+            <a:avLst/>
+          </a:prstGeom>
+          <a:noFill/>
+        </p:spPr>
+        <p:txBody>
+          <a:bodyPr wrap="square">
+            <a:spAutoFit/>
+          </a:bodyPr>
+          <a:lstStyle/>
+          <a:p>
+            <a:pPr>
+              <a:spcAft>
+                <a:spcPts val="800"/>
+              </a:spcAft>
+              <a:defRPr sz="1700">
+                <a:solidFill>
+                  <a:srgbClr val="333333"/>
+                </a:solidFill>
+                <a:latin typeface="Calibri"/>
+              </a:defRPr>
+            </a:pPr>
+            <a:r>
+              <a:t>• Modular code = easier maintenance</a:t>
+            </a:r>
+          </a:p>
+          <a:p>
+            <a:pPr>
+              <a:spcAft>
+                <a:spcPts val="800"/>
+              </a:spcAft>
+              <a:defRPr sz="1700">
+                <a:solidFill>
+                  <a:srgbClr val="333333"/>
+                </a:solidFill>
+                <a:latin typeface="Calibri"/>
+              </a:defRPr>
+            </a:pPr>
+            <a:r>
+              <a:t>• Input validation prevents crashes</a:t>
+            </a:r>
+          </a:p>
+          <a:p>
+            <a:pPr>
+              <a:spcAft>
+                <a:spcPts val="800"/>
+              </a:spcAft>
+              <a:defRPr sz="1700">
+                <a:solidFill>
+                  <a:srgbClr val="333333"/>
+                </a:solidFill>
+                <a:latin typeface="Calibri"/>
+              </a:defRPr>
+            </a:pPr>
+            <a:r>
+              <a:t>• SQLite &gt; in-memory for persistence</a:t>
+            </a:r>
+          </a:p>
+          <a:p>
+            <a:pPr>
+              <a:spcAft>
+                <a:spcPts val="800"/>
+              </a:spcAft>
+              <a:defRPr sz="1700">
+                <a:solidFill>
+                  <a:srgbClr val="333333"/>
+                </a:solidFill>
+                <a:latin typeface="Calibri"/>
+              </a:defRPr>
+            </a:pPr>
+            <a:r>
+              <a:t>• Unit testing catches bugs early</a:t>
             </a:r>
           </a:p>
         </p:txBody>
@@ -3778,21 +4061,64 @@
               </a:defRPr>
             </a:pPr>
             <a:r>
-              <a:t>Unit Testing</a:t>
-            </a:r>
-          </a:p>
-        </p:txBody>
-      </p:sp>
-      <p:sp>
-        <p:nvSpPr>
-          <p:cNvPr id="3" name="TextBox 2"/>
+              <a:t>Future Improvements</a:t>
+            </a:r>
+          </a:p>
+        </p:txBody>
+      </p:sp>
+      <p:sp>
+        <p:nvSpPr>
+          <p:cNvPr id="3" name="Rectangle 2"/>
+          <p:cNvSpPr/>
+          <p:nvPr/>
+        </p:nvSpPr>
+        <p:spPr>
+          <a:xfrm>
+            <a:off x="731520" y="1097280"/>
+            <a:ext cx="2926080" cy="38100"/>
+          </a:xfrm>
+          <a:prstGeom prst="rect">
+            <a:avLst/>
+          </a:prstGeom>
+          <a:solidFill>
+            <a:srgbClr val="1A56DB"/>
+          </a:solidFill>
+          <a:ln>
+            <a:noFill/>
+          </a:ln>
+        </p:spPr>
+        <p:style>
+          <a:lnRef idx="1">
+            <a:schemeClr val="accent1"/>
+          </a:lnRef>
+          <a:fillRef idx="3">
+            <a:schemeClr val="accent1"/>
+          </a:fillRef>
+          <a:effectRef idx="2">
+            <a:schemeClr val="accent1"/>
+          </a:effectRef>
+          <a:fontRef idx="minor">
+            <a:schemeClr val="lt1"/>
+          </a:fontRef>
+        </p:style>
+        <p:txBody>
+          <a:bodyPr rtlCol="0" anchor="ctr"/>
+          <a:lstStyle/>
+          <a:p>
+            <a:pPr algn="ctr"/>
+          </a:p>
+        </p:txBody>
+      </p:sp>
+      <p:sp>
+        <p:nvSpPr>
+          <p:cNvPr id="4" name="TextBox 3"/>
           <p:cNvSpPr txBox="1"/>
           <p:nvPr/>
         </p:nvSpPr>
         <p:spPr>
           <a:xfrm>
             <a:off x="731520" y="1645920"/>
-            <a:ext cx="5029200" cy="4572000"/>
+            <a:ext cx="10058400" cy="4114800"/>
           </a:xfrm>
           <a:prstGeom prst="rect">
             <a:avLst/>
@@ -3809,7 +4135,7 @@
               <a:spcAft>
                 <a:spcPts val="800"/>
               </a:spcAft>
-              <a:defRPr sz="1800">
+              <a:defRPr sz="2000">
                 <a:solidFill>
                   <a:srgbClr val="333333"/>
                 </a:solidFill>
@@ -3817,7 +4143,7 @@
               </a:defRPr>
             </a:pPr>
             <a:r>
-              <a:t>32 automated tests using unittest</a:t>
+              <a:t>• Export to CSV, PDF, Excel</a:t>
             </a:r>
           </a:p>
           <a:p>
@@ -3825,20 +4151,23 @@
               <a:spcAft>
                 <a:spcPts val="800"/>
               </a:spcAft>
-              <a:defRPr sz="1800">
+              <a:defRPr sz="2000">
                 <a:solidFill>
                   <a:srgbClr val="333333"/>
                 </a:solidFill>
                 <a:latin typeface="Calibri"/>
               </a:defRPr>
             </a:pPr>
+            <a:r>
+              <a:t>• Configurable departments</a:t>
+            </a:r>
           </a:p>
           <a:p>
             <a:pPr>
               <a:spcAft>
                 <a:spcPts val="800"/>
               </a:spcAft>
-              <a:defRPr sz="1800">
+              <a:defRPr sz="2000">
                 <a:solidFill>
                   <a:srgbClr val="333333"/>
                 </a:solidFill>
@@ -3846,232 +4175,7 @@
               </a:defRPr>
             </a:pPr>
             <a:r>
-              <a:t>• ID generation — auto-incrementing</a:t>
-            </a:r>
-          </a:p>
-          <a:p>
-            <a:pPr>
-              <a:spcAft>
-                <a:spcPts val="800"/>
-              </a:spcAft>
-              <a:defRPr sz="1800">
-                <a:solidFill>
-                  <a:srgbClr val="333333"/>
-                </a:solidFill>
-                <a:latin typeface="Calibri"/>
-              </a:defRPr>
-            </a:pPr>
-            <a:r>
-              <a:t>• Color palettes — valid hex, unique shades</a:t>
-            </a:r>
-          </a:p>
-          <a:p>
-            <a:pPr>
-              <a:spcAft>
-                <a:spcPts val="800"/>
-              </a:spcAft>
-              <a:defRPr sz="1800">
-                <a:solidFill>
-                  <a:srgbClr val="333333"/>
-                </a:solidFill>
-                <a:latin typeface="Calibri"/>
-              </a:defRPr>
-            </a:pPr>
-            <a:r>
-              <a:t>• Department filtering — by name, case-insensitive</a:t>
-            </a:r>
-          </a:p>
-          <a:p>
-            <a:pPr>
-              <a:spcAft>
-                <a:spcPts val="800"/>
-              </a:spcAft>
-              <a:defRPr sz="1800">
-                <a:solidFill>
-                  <a:srgbClr val="333333"/>
-                </a:solidFill>
-                <a:latin typeface="Calibri"/>
-              </a:defRPr>
-            </a:pPr>
-            <a:r>
-              <a:t>• Sorting — descending order by tickets</a:t>
-            </a:r>
-          </a:p>
-          <a:p>
-            <a:pPr>
-              <a:spcAft>
-                <a:spcPts val="800"/>
-              </a:spcAft>
-              <a:defRPr sz="1800">
-                <a:solidFill>
-                  <a:srgbClr val="333333"/>
-                </a:solidFill>
-                <a:latin typeface="Calibri"/>
-              </a:defRPr>
-            </a:pPr>
-            <a:r>
-              <a:t>• Duplicate detection — same name+dept blocked</a:t>
-            </a:r>
-          </a:p>
-        </p:txBody>
-      </p:sp>
-      <p:sp>
-        <p:nvSpPr>
-          <p:cNvPr id="4" name="TextBox 3"/>
-          <p:cNvSpPr txBox="1"/>
-          <p:nvPr/>
-        </p:nvSpPr>
-        <p:spPr>
-          <a:xfrm>
-            <a:off x="5943600" y="1645920"/>
-            <a:ext cx="5486400" cy="4572000"/>
-          </a:xfrm>
-          <a:prstGeom prst="rect">
-            <a:avLst/>
-          </a:prstGeom>
-          <a:noFill/>
-        </p:spPr>
-        <p:txBody>
-          <a:bodyPr wrap="square">
-            <a:spAutoFit/>
-          </a:bodyPr>
-          <a:lstStyle/>
-          <a:p>
-            <a:pPr>
-              <a:spcAft>
-                <a:spcPts val="800"/>
-              </a:spcAft>
-              <a:defRPr sz="1800">
-                <a:solidFill>
-                  <a:srgbClr val="333333"/>
-                </a:solidFill>
-                <a:latin typeface="Calibri"/>
-              </a:defRPr>
-            </a:pPr>
-            <a:r>
-              <a:t>Run tests:</a:t>
-            </a:r>
-          </a:p>
-          <a:p>
-            <a:pPr>
-              <a:spcAft>
-                <a:spcPts val="800"/>
-              </a:spcAft>
-              <a:defRPr sz="1800">
-                <a:solidFill>
-                  <a:srgbClr val="333333"/>
-                </a:solidFill>
-                <a:latin typeface="Calibri"/>
-              </a:defRPr>
-            </a:pPr>
-            <a:r>
-              <a:t>  python -m unittest test_employees -v</a:t>
-            </a:r>
-          </a:p>
-          <a:p>
-            <a:pPr>
-              <a:spcAft>
-                <a:spcPts val="800"/>
-              </a:spcAft>
-              <a:defRPr sz="1800">
-                <a:solidFill>
-                  <a:srgbClr val="333333"/>
-                </a:solidFill>
-                <a:latin typeface="Calibri"/>
-              </a:defRPr>
-            </a:pPr>
-          </a:p>
-          <a:p>
-            <a:pPr>
-              <a:spcAft>
-                <a:spcPts val="800"/>
-              </a:spcAft>
-              <a:defRPr sz="1800">
-                <a:solidFill>
-                  <a:srgbClr val="333333"/>
-                </a:solidFill>
-                <a:latin typeface="Calibri"/>
-              </a:defRPr>
-            </a:pPr>
-            <a:r>
-              <a:t>• Input validation — alphanumeric, empty, departments</a:t>
-            </a:r>
-          </a:p>
-          <a:p>
-            <a:pPr>
-              <a:spcAft>
-                <a:spcPts val="800"/>
-              </a:spcAft>
-              <a:defRPr sz="1800">
-                <a:solidFill>
-                  <a:srgbClr val="333333"/>
-                </a:solidFill>
-                <a:latin typeface="Calibri"/>
-              </a:defRPr>
-            </a:pPr>
-            <a:r>
-              <a:t>• Search — exact, partial, case-insensitive</a:t>
-            </a:r>
-          </a:p>
-          <a:p>
-            <a:pPr>
-              <a:spcAft>
-                <a:spcPts val="800"/>
-              </a:spcAft>
-              <a:defRPr sz="1800">
-                <a:solidFill>
-                  <a:srgbClr val="333333"/>
-                </a:solidFill>
-                <a:latin typeface="Calibri"/>
-              </a:defRPr>
-            </a:pPr>
-            <a:r>
-              <a:t>• Create employee — valid add, reject duplicates</a:t>
-            </a:r>
-          </a:p>
-          <a:p>
-            <a:pPr>
-              <a:spcAft>
-                <a:spcPts val="800"/>
-              </a:spcAft>
-              <a:defRPr sz="1800">
-                <a:solidFill>
-                  <a:srgbClr val="333333"/>
-                </a:solidFill>
-                <a:latin typeface="Calibri"/>
-              </a:defRPr>
-            </a:pPr>
-            <a:r>
-              <a:t>• Delete employee — confirm, cancel, nonexistent</a:t>
-            </a:r>
-          </a:p>
-          <a:p>
-            <a:pPr>
-              <a:spcAft>
-                <a:spcPts val="800"/>
-              </a:spcAft>
-              <a:defRPr sz="1800">
-                <a:solidFill>
-                  <a:srgbClr val="333333"/>
-                </a:solidFill>
-                <a:latin typeface="Calibri"/>
-              </a:defRPr>
-            </a:pPr>
-          </a:p>
-          <a:p>
-            <a:pPr>
-              <a:spcAft>
-                <a:spcPts val="800"/>
-              </a:spcAft>
-              <a:defRPr sz="1800">
-                <a:solidFill>
-                  <a:srgbClr val="333333"/>
-                </a:solidFill>
-                <a:latin typeface="Calibri"/>
-              </a:defRPr>
-            </a:pPr>
-            <a:r>
-              <a:t>All 32 tests pass in 0.003 seconds</a:t>
+              <a:t>• Web interface (Flask / Django)</a:t>
             </a:r>
           </a:p>
         </p:txBody>
@@ -4133,21 +4237,145 @@
               </a:defRPr>
             </a:pPr>
             <a:r>
-              <a:t>Conclusion</a:t>
-            </a:r>
-          </a:p>
-        </p:txBody>
-      </p:sp>
-      <p:sp>
-        <p:nvSpPr>
-          <p:cNvPr id="3" name="TextBox 2"/>
+              <a:t>Unit Testing</a:t>
+            </a:r>
+          </a:p>
+        </p:txBody>
+      </p:sp>
+      <p:sp>
+        <p:nvSpPr>
+          <p:cNvPr id="3" name="Rectangle 2"/>
+          <p:cNvSpPr/>
+          <p:nvPr/>
+        </p:nvSpPr>
+        <p:spPr>
+          <a:xfrm>
+            <a:off x="731520" y="1097280"/>
+            <a:ext cx="1828800" cy="38100"/>
+          </a:xfrm>
+          <a:prstGeom prst="rect">
+            <a:avLst/>
+          </a:prstGeom>
+          <a:solidFill>
+            <a:srgbClr val="1A56DB"/>
+          </a:solidFill>
+          <a:ln>
+            <a:noFill/>
+          </a:ln>
+        </p:spPr>
+        <p:style>
+          <a:lnRef idx="1">
+            <a:schemeClr val="accent1"/>
+          </a:lnRef>
+          <a:fillRef idx="3">
+            <a:schemeClr val="accent1"/>
+          </a:fillRef>
+          <a:effectRef idx="2">
+            <a:schemeClr val="accent1"/>
+          </a:effectRef>
+          <a:fontRef idx="minor">
+            <a:schemeClr val="lt1"/>
+          </a:fontRef>
+        </p:style>
+        <p:txBody>
+          <a:bodyPr rtlCol="0" anchor="ctr"/>
+          <a:lstStyle/>
+          <a:p>
+            <a:pPr algn="ctr"/>
+          </a:p>
+        </p:txBody>
+      </p:sp>
+      <p:sp>
+        <p:nvSpPr>
+          <p:cNvPr id="4" name="Rounded Rectangle 3"/>
+          <p:cNvSpPr/>
+          <p:nvPr/>
+        </p:nvSpPr>
+        <p:spPr>
+          <a:xfrm>
+            <a:off x="3657600" y="1463040"/>
+            <a:ext cx="4846320" cy="640080"/>
+          </a:xfrm>
+          <a:prstGeom prst="roundRect">
+            <a:avLst/>
+          </a:prstGeom>
+          <a:solidFill>
+            <a:srgbClr val="167F3D"/>
+          </a:solidFill>
+          <a:ln w="19050">
+            <a:solidFill>
+              <a:srgbClr val="167F3D"/>
+            </a:solidFill>
+          </a:ln>
+        </p:spPr>
+        <p:style>
+          <a:lnRef idx="1">
+            <a:schemeClr val="accent1"/>
+          </a:lnRef>
+          <a:fillRef idx="3">
+            <a:schemeClr val="accent1"/>
+          </a:fillRef>
+          <a:effectRef idx="2">
+            <a:schemeClr val="accent1"/>
+          </a:effectRef>
+          <a:fontRef idx="minor">
+            <a:schemeClr val="lt1"/>
+          </a:fontRef>
+        </p:style>
+        <p:txBody>
+          <a:bodyPr rtlCol="0" anchor="ctr"/>
+          <a:lstStyle/>
+          <a:p>
+            <a:pPr algn="ctr"/>
+          </a:p>
+        </p:txBody>
+      </p:sp>
+      <p:sp>
+        <p:nvSpPr>
+          <p:cNvPr id="5" name="TextBox 4"/>
           <p:cNvSpPr txBox="1"/>
           <p:nvPr/>
         </p:nvSpPr>
         <p:spPr>
           <a:xfrm>
-            <a:off x="731520" y="1645920"/>
-            <a:ext cx="10058400" cy="4114800"/>
+            <a:off x="3840480" y="1508760"/>
+            <a:ext cx="4572000" cy="548640"/>
+          </a:xfrm>
+          <a:prstGeom prst="rect">
+            <a:avLst/>
+          </a:prstGeom>
+          <a:noFill/>
+        </p:spPr>
+        <p:txBody>
+          <a:bodyPr wrap="square">
+            <a:spAutoFit/>
+          </a:bodyPr>
+          <a:lstStyle/>
+          <a:p>
+            <a:pPr algn="ctr">
+              <a:defRPr sz="2000" b="1">
+                <a:solidFill>
+                  <a:srgbClr val="FFFFFF"/>
+                </a:solidFill>
+                <a:latin typeface="Calibri"/>
+              </a:defRPr>
+            </a:pPr>
+            <a:r>
+              <a:t>33 tests  •  All passing</a:t>
+            </a:r>
+          </a:p>
+        </p:txBody>
+      </p:sp>
+      <p:sp>
+        <p:nvSpPr>
+          <p:cNvPr id="6" name="TextBox 5"/>
+          <p:cNvSpPr txBox="1"/>
+          <p:nvPr/>
+        </p:nvSpPr>
+        <p:spPr>
+          <a:xfrm>
+            <a:off x="731520" y="2468880"/>
+            <a:ext cx="5029200" cy="4114800"/>
           </a:xfrm>
           <a:prstGeom prst="rect">
             <a:avLst/>
@@ -4164,7 +4392,7 @@
               <a:spcAft>
                 <a:spcPts val="800"/>
               </a:spcAft>
-              <a:defRPr sz="2000">
+              <a:defRPr sz="1800">
                 <a:solidFill>
                   <a:srgbClr val="333333"/>
                 </a:solidFill>
@@ -4172,7 +4400,7 @@
               </a:defRPr>
             </a:pPr>
             <a:r>
-              <a:t>• Built a fully functional CLI app to track employee weekly ticket completions</a:t>
+              <a:t>• Database init + seeding</a:t>
             </a:r>
           </a:p>
           <a:p>
@@ -4180,7 +4408,7 @@
               <a:spcAft>
                 <a:spcPts val="800"/>
               </a:spcAft>
-              <a:defRPr sz="2000">
+              <a:defRPr sz="1800">
                 <a:solidFill>
                   <a:srgbClr val="333333"/>
                 </a:solidFill>
@@ -4188,7 +4416,7 @@
               </a:defRPr>
             </a:pPr>
             <a:r>
-              <a:t>• Implemented full CRUD operations with robust input validation</a:t>
+              <a:t>• Color palettes — hex, unique</a:t>
             </a:r>
           </a:p>
           <a:p>
@@ -4196,7 +4424,7 @@
               <a:spcAft>
                 <a:spcPts val="800"/>
               </a:spcAft>
-              <a:defRPr sz="2000">
+              <a:defRPr sz="1800">
                 <a:solidFill>
                   <a:srgbClr val="333333"/>
                 </a:solidFill>
@@ -4204,7 +4432,7 @@
               </a:defRPr>
             </a:pPr>
             <a:r>
-              <a:t>• Created dual visualizations — terminal chart and matplotlib graphical chart</a:t>
+              <a:t>• Department filtering</a:t>
             </a:r>
           </a:p>
           <a:p>
@@ -4212,7 +4440,7 @@
               <a:spcAft>
                 <a:spcPts val="800"/>
               </a:spcAft>
-              <a:defRPr sz="2000">
+              <a:defRPr sz="1800">
                 <a:solidFill>
                   <a:srgbClr val="333333"/>
                 </a:solidFill>
@@ -4220,7 +4448,7 @@
               </a:defRPr>
             </a:pPr>
             <a:r>
-              <a:t>• Each employee gets a unique color shade within their department</a:t>
+              <a:t>• Sorting by tickets</a:t>
             </a:r>
           </a:p>
           <a:p>
@@ -4228,7 +4456,7 @@
               <a:spcAft>
                 <a:spcPts val="800"/>
               </a:spcAft>
-              <a:defRPr sz="2000">
+              <a:defRPr sz="1800">
                 <a:solidFill>
                   <a:srgbClr val="333333"/>
                 </a:solidFill>
@@ -4236,15 +4464,38 @@
               </a:defRPr>
             </a:pPr>
             <a:r>
-              <a:t>• Added search functionality and 32 passing unit tests</a:t>
-            </a:r>
-          </a:p>
+              <a:t>• Duplicate detection</a:t>
+            </a:r>
+          </a:p>
+        </p:txBody>
+      </p:sp>
+      <p:sp>
+        <p:nvSpPr>
+          <p:cNvPr id="7" name="TextBox 6"/>
+          <p:cNvSpPr txBox="1"/>
+          <p:nvPr/>
+        </p:nvSpPr>
+        <p:spPr>
+          <a:xfrm>
+            <a:off x="5943600" y="2468880"/>
+            <a:ext cx="5486400" cy="4114800"/>
+          </a:xfrm>
+          <a:prstGeom prst="rect">
+            <a:avLst/>
+          </a:prstGeom>
+          <a:noFill/>
+        </p:spPr>
+        <p:txBody>
+          <a:bodyPr wrap="square">
+            <a:spAutoFit/>
+          </a:bodyPr>
+          <a:lstStyle/>
           <a:p>
             <a:pPr>
               <a:spcAft>
                 <a:spcPts val="800"/>
               </a:spcAft>
-              <a:defRPr sz="2000">
+              <a:defRPr sz="1800">
                 <a:solidFill>
                   <a:srgbClr val="333333"/>
                 </a:solidFill>
@@ -4252,7 +4503,71 @@
               </a:defRPr>
             </a:pPr>
             <a:r>
-              <a:t>• The project demonstrates core Python skills: functions, data structures, loops, error handling, and libraries</a:t>
+              <a:t>• Input validation</a:t>
+            </a:r>
+          </a:p>
+          <a:p>
+            <a:pPr>
+              <a:spcAft>
+                <a:spcPts val="800"/>
+              </a:spcAft>
+              <a:defRPr sz="1800">
+                <a:solidFill>
+                  <a:srgbClr val="333333"/>
+                </a:solidFill>
+                <a:latin typeface="Calibri"/>
+              </a:defRPr>
+            </a:pPr>
+            <a:r>
+              <a:t>• Search — exact, partial, case</a:t>
+            </a:r>
+          </a:p>
+          <a:p>
+            <a:pPr>
+              <a:spcAft>
+                <a:spcPts val="800"/>
+              </a:spcAft>
+              <a:defRPr sz="1800">
+                <a:solidFill>
+                  <a:srgbClr val="333333"/>
+                </a:solidFill>
+                <a:latin typeface="Calibri"/>
+              </a:defRPr>
+            </a:pPr>
+            <a:r>
+              <a:t>• Create + delete via DB</a:t>
+            </a:r>
+          </a:p>
+          <a:p>
+            <a:pPr>
+              <a:spcAft>
+                <a:spcPts val="800"/>
+              </a:spcAft>
+              <a:defRPr sz="1800">
+                <a:solidFill>
+                  <a:srgbClr val="333333"/>
+                </a:solidFill>
+                <a:latin typeface="Calibri"/>
+              </a:defRPr>
+            </a:pPr>
+            <a:r>
+              <a:t>• Update + nonexistent handling</a:t>
+            </a:r>
+          </a:p>
+          <a:p>
+            <a:pPr>
+              <a:spcAft>
+                <a:spcPts val="800"/>
+              </a:spcAft>
+              <a:defRPr sz="1800">
+                <a:solidFill>
+                  <a:srgbClr val="333333"/>
+                </a:solidFill>
+                <a:latin typeface="Calibri"/>
+              </a:defRPr>
+            </a:pPr>
+            <a:r>
+              <a:t>• Isolated test database</a:t>
             </a:r>
           </a:p>
         </p:txBody>
@@ -4291,8 +4606,8 @@
         </p:nvSpPr>
         <p:spPr>
           <a:xfrm>
-            <a:off x="914400" y="1828800"/>
-            <a:ext cx="10058400" cy="914400"/>
+            <a:off x="731520" y="457200"/>
+            <a:ext cx="10058400" cy="731520"/>
           </a:xfrm>
           <a:prstGeom prst="rect">
             <a:avLst/>
@@ -4305,8 +4620,8 @@
           </a:bodyPr>
           <a:lstStyle/>
           <a:p>
-            <a:pPr algn="ctr">
-              <a:defRPr sz="4400" b="1">
+            <a:pPr algn="l">
+              <a:defRPr sz="3600" b="1">
                 <a:solidFill>
                   <a:srgbClr val="1A56DB"/>
                 </a:solidFill>
@@ -4314,21 +4629,64 @@
               </a:defRPr>
             </a:pPr>
             <a:r>
-              <a:t>Questions?</a:t>
-            </a:r>
-          </a:p>
-        </p:txBody>
-      </p:sp>
-      <p:sp>
-        <p:nvSpPr>
-          <p:cNvPr id="3" name="TextBox 2"/>
+              <a:t>Conclusion</a:t>
+            </a:r>
+          </a:p>
+        </p:txBody>
+      </p:sp>
+      <p:sp>
+        <p:nvSpPr>
+          <p:cNvPr id="3" name="Rectangle 2"/>
+          <p:cNvSpPr/>
+          <p:nvPr/>
+        </p:nvSpPr>
+        <p:spPr>
+          <a:xfrm>
+            <a:off x="731520" y="1097280"/>
+            <a:ext cx="2011680" cy="38100"/>
+          </a:xfrm>
+          <a:prstGeom prst="rect">
+            <a:avLst/>
+          </a:prstGeom>
+          <a:solidFill>
+            <a:srgbClr val="1A56DB"/>
+          </a:solidFill>
+          <a:ln>
+            <a:noFill/>
+          </a:ln>
+        </p:spPr>
+        <p:style>
+          <a:lnRef idx="1">
+            <a:schemeClr val="accent1"/>
+          </a:lnRef>
+          <a:fillRef idx="3">
+            <a:schemeClr val="accent1"/>
+          </a:fillRef>
+          <a:effectRef idx="2">
+            <a:schemeClr val="accent1"/>
+          </a:effectRef>
+          <a:fontRef idx="minor">
+            <a:schemeClr val="lt1"/>
+          </a:fontRef>
+        </p:style>
+        <p:txBody>
+          <a:bodyPr rtlCol="0" anchor="ctr"/>
+          <a:lstStyle/>
+          <a:p>
+            <a:pPr algn="ctr"/>
+          </a:p>
+        </p:txBody>
+      </p:sp>
+      <p:sp>
+        <p:nvSpPr>
+          <p:cNvPr id="4" name="TextBox 3"/>
           <p:cNvSpPr txBox="1"/>
           <p:nvPr/>
         </p:nvSpPr>
         <p:spPr>
           <a:xfrm>
-            <a:off x="914400" y="3200400"/>
-            <a:ext cx="10058400" cy="548640"/>
+            <a:off x="731520" y="1645920"/>
+            <a:ext cx="10058400" cy="4114800"/>
           </a:xfrm>
           <a:prstGeom prst="rect">
             <a:avLst/>
@@ -4341,6 +4699,257 @@
           </a:bodyPr>
           <a:lstStyle/>
           <a:p>
+            <a:pPr>
+              <a:spcAft>
+                <a:spcPts val="800"/>
+              </a:spcAft>
+              <a:defRPr sz="2000">
+                <a:solidFill>
+                  <a:srgbClr val="333333"/>
+                </a:solidFill>
+                <a:latin typeface="Calibri"/>
+              </a:defRPr>
+            </a:pPr>
+            <a:r>
+              <a:t>• Full CRUD CLI app with SQLite persistence</a:t>
+            </a:r>
+          </a:p>
+          <a:p>
+            <a:pPr>
+              <a:spcAft>
+                <a:spcPts val="800"/>
+              </a:spcAft>
+              <a:defRPr sz="2000">
+                <a:solidFill>
+                  <a:srgbClr val="333333"/>
+                </a:solidFill>
+                <a:latin typeface="Calibri"/>
+              </a:defRPr>
+            </a:pPr>
+            <a:r>
+              <a:t>• Dual visualizations — terminal + matplotlib</a:t>
+            </a:r>
+          </a:p>
+          <a:p>
+            <a:pPr>
+              <a:spcAft>
+                <a:spcPts val="800"/>
+              </a:spcAft>
+              <a:defRPr sz="2000">
+                <a:solidFill>
+                  <a:srgbClr val="333333"/>
+                </a:solidFill>
+                <a:latin typeface="Calibri"/>
+              </a:defRPr>
+            </a:pPr>
+            <a:r>
+              <a:t>• Modularized: database, charts, main app</a:t>
+            </a:r>
+          </a:p>
+          <a:p>
+            <a:pPr>
+              <a:spcAft>
+                <a:spcPts val="800"/>
+              </a:spcAft>
+              <a:defRPr sz="2000">
+                <a:solidFill>
+                  <a:srgbClr val="333333"/>
+                </a:solidFill>
+                <a:latin typeface="Calibri"/>
+              </a:defRPr>
+            </a:pPr>
+            <a:r>
+              <a:t>• Docstrings on every function</a:t>
+            </a:r>
+          </a:p>
+          <a:p>
+            <a:pPr>
+              <a:spcAft>
+                <a:spcPts val="800"/>
+              </a:spcAft>
+              <a:defRPr sz="2000">
+                <a:solidFill>
+                  <a:srgbClr val="333333"/>
+                </a:solidFill>
+                <a:latin typeface="Calibri"/>
+              </a:defRPr>
+            </a:pPr>
+            <a:r>
+              <a:t>• 33 passing unit tests</a:t>
+            </a:r>
+          </a:p>
+        </p:txBody>
+      </p:sp>
+    </p:spTree>
+  </p:cSld>
+  <p:clrMapOvr>
+    <a:masterClrMapping/>
+  </p:clrMapOvr>
+</p:sld>
+</file>
+
+<file path=ppt/slides/slide16.xml><?xml version="1.0" encoding="utf-8"?>
+<p:sld xmlns:a="http://schemas.openxmlformats.org/drawingml/2006/main" xmlns:p="http://schemas.openxmlformats.org/presentationml/2006/main" xmlns:r="http://schemas.openxmlformats.org/officeDocument/2006/relationships">
+  <p:cSld>
+    <p:bg>
+      <p:bgPr>
+        <a:solidFill>
+          <a:srgbClr val="FFFFFF"/>
+        </a:solidFill>
+        <a:effectLst/>
+      </p:bgPr>
+    </p:bg>
+    <p:spTree>
+      <p:nvGrpSpPr>
+        <p:cNvPr id="1" name=""/>
+        <p:cNvGrpSpPr/>
+        <p:nvPr/>
+      </p:nvGrpSpPr>
+      <p:grpSpPr/>
+      <p:sp>
+        <p:nvSpPr>
+          <p:cNvPr id="2" name="Rounded Rectangle 1"/>
+          <p:cNvSpPr/>
+          <p:nvPr/>
+        </p:nvSpPr>
+        <p:spPr>
+          <a:xfrm>
+            <a:off x="0" y="0"/>
+            <a:ext cx="12191695" cy="137160"/>
+          </a:xfrm>
+          <a:prstGeom prst="roundRect">
+            <a:avLst/>
+          </a:prstGeom>
+          <a:solidFill>
+            <a:srgbClr val="1A56DB"/>
+          </a:solidFill>
+          <a:ln>
+            <a:noFill/>
+          </a:ln>
+        </p:spPr>
+        <p:style>
+          <a:lnRef idx="1">
+            <a:schemeClr val="accent1"/>
+          </a:lnRef>
+          <a:fillRef idx="3">
+            <a:schemeClr val="accent1"/>
+          </a:fillRef>
+          <a:effectRef idx="2">
+            <a:schemeClr val="accent1"/>
+          </a:effectRef>
+          <a:fontRef idx="minor">
+            <a:schemeClr val="lt1"/>
+          </a:fontRef>
+        </p:style>
+        <p:txBody>
+          <a:bodyPr rtlCol="0" anchor="ctr"/>
+          <a:lstStyle/>
+          <a:p>
+            <a:pPr algn="ctr"/>
+          </a:p>
+        </p:txBody>
+      </p:sp>
+      <p:sp>
+        <p:nvSpPr>
+          <p:cNvPr id="3" name="TextBox 2"/>
+          <p:cNvSpPr txBox="1"/>
+          <p:nvPr/>
+        </p:nvSpPr>
+        <p:spPr>
+          <a:xfrm>
+            <a:off x="914400" y="2286000"/>
+            <a:ext cx="10058400" cy="914400"/>
+          </a:xfrm>
+          <a:prstGeom prst="rect">
+            <a:avLst/>
+          </a:prstGeom>
+          <a:noFill/>
+        </p:spPr>
+        <p:txBody>
+          <a:bodyPr wrap="square">
+            <a:spAutoFit/>
+          </a:bodyPr>
+          <a:lstStyle/>
+          <a:p>
+            <a:pPr algn="ctr">
+              <a:defRPr sz="4400" b="1">
+                <a:solidFill>
+                  <a:srgbClr val="1A56DB"/>
+                </a:solidFill>
+                <a:latin typeface="Calibri"/>
+              </a:defRPr>
+            </a:pPr>
+            <a:r>
+              <a:t>Questions?</a:t>
+            </a:r>
+          </a:p>
+        </p:txBody>
+      </p:sp>
+      <p:sp>
+        <p:nvSpPr>
+          <p:cNvPr id="4" name="Rectangle 3"/>
+          <p:cNvSpPr/>
+          <p:nvPr/>
+        </p:nvSpPr>
+        <p:spPr>
+          <a:xfrm>
+            <a:off x="4572000" y="3383280"/>
+            <a:ext cx="3017520" cy="38100"/>
+          </a:xfrm>
+          <a:prstGeom prst="rect">
+            <a:avLst/>
+          </a:prstGeom>
+          <a:solidFill>
+            <a:srgbClr val="1A56DB"/>
+          </a:solidFill>
+          <a:ln>
+            <a:noFill/>
+          </a:ln>
+        </p:spPr>
+        <p:style>
+          <a:lnRef idx="1">
+            <a:schemeClr val="accent1"/>
+          </a:lnRef>
+          <a:fillRef idx="3">
+            <a:schemeClr val="accent1"/>
+          </a:fillRef>
+          <a:effectRef idx="2">
+            <a:schemeClr val="accent1"/>
+          </a:effectRef>
+          <a:fontRef idx="minor">
+            <a:schemeClr val="lt1"/>
+          </a:fontRef>
+        </p:style>
+        <p:txBody>
+          <a:bodyPr rtlCol="0" anchor="ctr"/>
+          <a:lstStyle/>
+          <a:p>
+            <a:pPr algn="ctr"/>
+          </a:p>
+        </p:txBody>
+      </p:sp>
+      <p:sp>
+        <p:nvSpPr>
+          <p:cNvPr id="5" name="TextBox 4"/>
+          <p:cNvSpPr txBox="1"/>
+          <p:nvPr/>
+        </p:nvSpPr>
+        <p:spPr>
+          <a:xfrm>
+            <a:off x="914400" y="3200400"/>
+            <a:ext cx="10058400" cy="548640"/>
+          </a:xfrm>
+          <a:prstGeom prst="rect">
+            <a:avLst/>
+          </a:prstGeom>
+          <a:noFill/>
+        </p:spPr>
+        <p:txBody>
+          <a:bodyPr wrap="square">
+            <a:spAutoFit/>
+          </a:bodyPr>
+          <a:lstStyle/>
+          <a:p>
             <a:pPr algn="ctr">
               <a:defRPr sz="2000" b="0">
                 <a:solidFill>
@@ -4357,7 +4966,7 @@
       </p:sp>
       <p:sp>
         <p:nvSpPr>
-          <p:cNvPr id="4" name="TextBox 3"/>
+          <p:cNvPr id="6" name="TextBox 5"/>
           <p:cNvSpPr txBox="1"/>
           <p:nvPr/>
         </p:nvSpPr>
@@ -4455,7 +5064,50 @@
       </p:sp>
       <p:sp>
         <p:nvSpPr>
-          <p:cNvPr id="3" name="TextBox 2"/>
+          <p:cNvPr id="3" name="Rectangle 2"/>
+          <p:cNvSpPr/>
+          <p:nvPr/>
+        </p:nvSpPr>
+        <p:spPr>
+          <a:xfrm>
+            <a:off x="731520" y="1097280"/>
+            <a:ext cx="2743200" cy="38100"/>
+          </a:xfrm>
+          <a:prstGeom prst="rect">
+            <a:avLst/>
+          </a:prstGeom>
+          <a:solidFill>
+            <a:srgbClr val="1A56DB"/>
+          </a:solidFill>
+          <a:ln>
+            <a:noFill/>
+          </a:ln>
+        </p:spPr>
+        <p:style>
+          <a:lnRef idx="1">
+            <a:schemeClr val="accent1"/>
+          </a:lnRef>
+          <a:fillRef idx="3">
+            <a:schemeClr val="accent1"/>
+          </a:fillRef>
+          <a:effectRef idx="2">
+            <a:schemeClr val="accent1"/>
+          </a:effectRef>
+          <a:fontRef idx="minor">
+            <a:schemeClr val="lt1"/>
+          </a:fontRef>
+        </p:style>
+        <p:txBody>
+          <a:bodyPr rtlCol="0" anchor="ctr"/>
+          <a:lstStyle/>
+          <a:p>
+            <a:pPr algn="ctr"/>
+          </a:p>
+        </p:txBody>
+      </p:sp>
+      <p:sp>
+        <p:nvSpPr>
+          <p:cNvPr id="4" name="TextBox 3"/>
           <p:cNvSpPr txBox="1"/>
           <p:nvPr/>
         </p:nvSpPr>
@@ -4487,7 +5139,7 @@
               </a:defRPr>
             </a:pPr>
             <a:r>
-              <a:t>• Teams need a simple way to track how many tickets each employee completes weekly</a:t>
+              <a:t>• Track weekly ticket completions per employee</a:t>
             </a:r>
           </a:p>
           <a:p>
@@ -4503,7 +5155,7 @@
               </a:defRPr>
             </a:pPr>
             <a:r>
-              <a:t>• Manual tracking is error-prone and hard to visualize</a:t>
+              <a:t>• Manual tracking is error-prone, hard to visualize</a:t>
             </a:r>
           </a:p>
           <a:p>
@@ -4519,7 +5171,7 @@
               </a:defRPr>
             </a:pPr>
             <a:r>
-              <a:t>• Managers need quick views — by department or across the whole team</a:t>
+              <a:t>• Need quick views by department or whole team</a:t>
             </a:r>
           </a:p>
           <a:p>
@@ -4535,7 +5187,7 @@
               </a:defRPr>
             </a:pPr>
             <a:r>
-              <a:t>• Metrics should be ranked from highest to lowest per department</a:t>
+              <a:t>• Rank metrics highest to lowest</a:t>
             </a:r>
           </a:p>
           <a:p>
@@ -4551,23 +5203,7 @@
               </a:defRPr>
             </a:pPr>
             <a:r>
-              <a:t>• Different colors needed to visually distinguish employees in charts</a:t>
-            </a:r>
-          </a:p>
-          <a:p>
-            <a:pPr>
-              <a:spcAft>
-                <a:spcPts val="800"/>
-              </a:spcAft>
-              <a:defRPr sz="2000">
-                <a:solidFill>
-                  <a:srgbClr val="333333"/>
-                </a:solidFill>
-                <a:latin typeface="Calibri"/>
-              </a:defRPr>
-            </a:pPr>
-            <a:r>
-              <a:t>• A lightweight CLI tool solves this without needing a full web app</a:t>
+              <a:t>• Persistent storage across sessions</a:t>
             </a:r>
           </a:p>
         </p:txBody>
@@ -4636,14 +5272,191 @@
       </p:sp>
       <p:sp>
         <p:nvSpPr>
-          <p:cNvPr id="3" name="TextBox 2"/>
+          <p:cNvPr id="3" name="Rectangle 2"/>
+          <p:cNvSpPr/>
+          <p:nvPr/>
+        </p:nvSpPr>
+        <p:spPr>
+          <a:xfrm>
+            <a:off x="731520" y="1097280"/>
+            <a:ext cx="1828800" cy="38100"/>
+          </a:xfrm>
+          <a:prstGeom prst="rect">
+            <a:avLst/>
+          </a:prstGeom>
+          <a:solidFill>
+            <a:srgbClr val="1A56DB"/>
+          </a:solidFill>
+          <a:ln>
+            <a:noFill/>
+          </a:ln>
+        </p:spPr>
+        <p:style>
+          <a:lnRef idx="1">
+            <a:schemeClr val="accent1"/>
+          </a:lnRef>
+          <a:fillRef idx="3">
+            <a:schemeClr val="accent1"/>
+          </a:fillRef>
+          <a:effectRef idx="2">
+            <a:schemeClr val="accent1"/>
+          </a:effectRef>
+          <a:fontRef idx="minor">
+            <a:schemeClr val="lt1"/>
+          </a:fontRef>
+        </p:style>
+        <p:txBody>
+          <a:bodyPr rtlCol="0" anchor="ctr"/>
+          <a:lstStyle/>
+          <a:p>
+            <a:pPr algn="ctr"/>
+          </a:p>
+        </p:txBody>
+      </p:sp>
+      <p:sp>
+        <p:nvSpPr>
+          <p:cNvPr id="4" name="Rounded Rectangle 3"/>
+          <p:cNvSpPr/>
+          <p:nvPr/>
+        </p:nvSpPr>
+        <p:spPr>
+          <a:xfrm>
+            <a:off x="731520" y="1463040"/>
+            <a:ext cx="5029200" cy="4389120"/>
+          </a:xfrm>
+          <a:prstGeom prst="roundRect">
+            <a:avLst/>
+          </a:prstGeom>
+          <a:solidFill>
+            <a:srgbClr val="E8F0FE"/>
+          </a:solidFill>
+          <a:ln w="19050">
+            <a:solidFill>
+              <a:srgbClr val="1A56DB"/>
+            </a:solidFill>
+          </a:ln>
+        </p:spPr>
+        <p:style>
+          <a:lnRef idx="1">
+            <a:schemeClr val="accent1"/>
+          </a:lnRef>
+          <a:fillRef idx="3">
+            <a:schemeClr val="accent1"/>
+          </a:fillRef>
+          <a:effectRef idx="2">
+            <a:schemeClr val="accent1"/>
+          </a:effectRef>
+          <a:fontRef idx="minor">
+            <a:schemeClr val="lt1"/>
+          </a:fontRef>
+        </p:style>
+        <p:txBody>
+          <a:bodyPr rtlCol="0" anchor="ctr"/>
+          <a:lstStyle/>
+          <a:p>
+            <a:pPr algn="ctr"/>
+          </a:p>
+        </p:txBody>
+      </p:sp>
+      <p:sp>
+        <p:nvSpPr>
+          <p:cNvPr id="5" name="Oval 4"/>
+          <p:cNvSpPr/>
+          <p:nvPr/>
+        </p:nvSpPr>
+        <p:spPr>
+          <a:xfrm>
+            <a:off x="1097280" y="1737360"/>
+            <a:ext cx="548640" cy="548640"/>
+          </a:xfrm>
+          <a:prstGeom prst="ellipse">
+            <a:avLst/>
+          </a:prstGeom>
+          <a:solidFill>
+            <a:srgbClr val="1A56DB"/>
+          </a:solidFill>
+          <a:ln>
+            <a:noFill/>
+          </a:ln>
+        </p:spPr>
+        <p:style>
+          <a:lnRef idx="1">
+            <a:schemeClr val="accent1"/>
+          </a:lnRef>
+          <a:fillRef idx="3">
+            <a:schemeClr val="accent1"/>
+          </a:fillRef>
+          <a:effectRef idx="2">
+            <a:schemeClr val="accent1"/>
+          </a:effectRef>
+          <a:fontRef idx="minor">
+            <a:schemeClr val="lt1"/>
+          </a:fontRef>
+        </p:style>
+        <p:txBody>
+          <a:bodyPr rtlCol="0" anchor="ctr" wrap="none"/>
+          <a:lstStyle/>
+          <a:p>
+            <a:pPr algn="ctr">
+              <a:defRPr sz="600" b="1">
+                <a:solidFill>
+                  <a:srgbClr val="FFFFFF"/>
+                </a:solidFill>
+                <a:latin typeface="Calibri"/>
+              </a:defRPr>
+            </a:pPr>
+            <a:r>
+              <a:t>C</a:t>
+            </a:r>
+          </a:p>
+        </p:txBody>
+      </p:sp>
+      <p:sp>
+        <p:nvSpPr>
+          <p:cNvPr id="6" name="TextBox 5"/>
           <p:cNvSpPr txBox="1"/>
           <p:nvPr/>
         </p:nvSpPr>
         <p:spPr>
           <a:xfrm>
-            <a:off x="731520" y="1645920"/>
-            <a:ext cx="5029200" cy="4572000"/>
+            <a:off x="1828800" y="1783080"/>
+            <a:ext cx="3657600" cy="457200"/>
+          </a:xfrm>
+          <a:prstGeom prst="rect">
+            <a:avLst/>
+          </a:prstGeom>
+          <a:noFill/>
+        </p:spPr>
+        <p:txBody>
+          <a:bodyPr wrap="square">
+            <a:spAutoFit/>
+          </a:bodyPr>
+          <a:lstStyle/>
+          <a:p>
+            <a:pPr algn="l">
+              <a:defRPr sz="2000" b="1">
+                <a:solidFill>
+                  <a:srgbClr val="1A56DB"/>
+                </a:solidFill>
+                <a:latin typeface="Calibri"/>
+              </a:defRPr>
+            </a:pPr>
+            <a:r>
+              <a:t>CRUD Operations</a:t>
+            </a:r>
+          </a:p>
+        </p:txBody>
+      </p:sp>
+      <p:sp>
+        <p:nvSpPr>
+          <p:cNvPr id="7" name="TextBox 6"/>
+          <p:cNvSpPr txBox="1"/>
+          <p:nvPr/>
+        </p:nvSpPr>
+        <p:spPr>
+          <a:xfrm>
+            <a:off x="1097280" y="2468880"/>
+            <a:ext cx="4389120" cy="3200400"/>
           </a:xfrm>
           <a:prstGeom prst="rect">
             <a:avLst/>
@@ -4660,7 +5473,7 @@
               <a:spcAft>
                 <a:spcPts val="800"/>
               </a:spcAft>
-              <a:defRPr sz="1800">
+              <a:defRPr sz="1700">
                 <a:solidFill>
                   <a:srgbClr val="333333"/>
                 </a:solidFill>
@@ -4676,7 +5489,7 @@
               <a:spcAft>
                 <a:spcPts val="800"/>
               </a:spcAft>
-              <a:defRPr sz="1800">
+              <a:defRPr sz="1700">
                 <a:solidFill>
                   <a:srgbClr val="333333"/>
                 </a:solidFill>
@@ -4684,7 +5497,7 @@
               </a:defRPr>
             </a:pPr>
             <a:r>
-              <a:t>• Filter and view by department</a:t>
+              <a:t>• Filter by department</a:t>
             </a:r>
           </a:p>
           <a:p>
@@ -4692,7 +5505,7 @@
               <a:spcAft>
                 <a:spcPts val="800"/>
               </a:spcAft>
-              <a:defRPr sz="1800">
+              <a:defRPr sz="1700">
                 <a:solidFill>
                   <a:srgbClr val="333333"/>
                 </a:solidFill>
@@ -4700,7 +5513,7 @@
               </a:defRPr>
             </a:pPr>
             <a:r>
-              <a:t>• Search employees by name (partial match)</a:t>
+              <a:t>• Search by name (partial match)</a:t>
             </a:r>
           </a:p>
           <a:p>
@@ -4708,7 +5521,7 @@
               <a:spcAft>
                 <a:spcPts val="800"/>
               </a:spcAft>
-              <a:defRPr sz="1800">
+              <a:defRPr sz="1700">
                 <a:solidFill>
                   <a:srgbClr val="333333"/>
                 </a:solidFill>
@@ -4716,7 +5529,7 @@
               </a:defRPr>
             </a:pPr>
             <a:r>
-              <a:t>• Add new employees with validation</a:t>
+              <a:t>• Add with validation</a:t>
             </a:r>
           </a:p>
           <a:p>
@@ -4724,7 +5537,7 @@
               <a:spcAft>
                 <a:spcPts val="800"/>
               </a:spcAft>
-              <a:defRPr sz="1800">
+              <a:defRPr sz="1700">
                 <a:solidFill>
                   <a:srgbClr val="333333"/>
                 </a:solidFill>
@@ -4732,7 +5545,7 @@
               </a:defRPr>
             </a:pPr>
             <a:r>
-              <a:t>• Update employee details by ID</a:t>
+              <a:t>• Update by ID</a:t>
             </a:r>
           </a:p>
           <a:p>
@@ -4740,7 +5553,7 @@
               <a:spcAft>
                 <a:spcPts val="800"/>
               </a:spcAft>
-              <a:defRPr sz="1800">
+              <a:defRPr sz="1700">
                 <a:solidFill>
                   <a:srgbClr val="333333"/>
                 </a:solidFill>
@@ -4748,21 +5561,155 @@
               </a:defRPr>
             </a:pPr>
             <a:r>
-              <a:t>• Delete employees with confirmation</a:t>
-            </a:r>
-          </a:p>
-        </p:txBody>
-      </p:sp>
-      <p:sp>
-        <p:nvSpPr>
-          <p:cNvPr id="4" name="TextBox 3"/>
+              <a:t>• Delete with confirmation</a:t>
+            </a:r>
+          </a:p>
+        </p:txBody>
+      </p:sp>
+      <p:sp>
+        <p:nvSpPr>
+          <p:cNvPr id="8" name="Rounded Rectangle 7"/>
+          <p:cNvSpPr/>
+          <p:nvPr/>
+        </p:nvSpPr>
+        <p:spPr>
+          <a:xfrm>
+            <a:off x="6217920" y="1463040"/>
+            <a:ext cx="5212080" cy="4389120"/>
+          </a:xfrm>
+          <a:prstGeom prst="roundRect">
+            <a:avLst/>
+          </a:prstGeom>
+          <a:solidFill>
+            <a:srgbClr val="E8F0FE"/>
+          </a:solidFill>
+          <a:ln w="19050">
+            <a:solidFill>
+              <a:srgbClr val="1A56DB"/>
+            </a:solidFill>
+          </a:ln>
+        </p:spPr>
+        <p:style>
+          <a:lnRef idx="1">
+            <a:schemeClr val="accent1"/>
+          </a:lnRef>
+          <a:fillRef idx="3">
+            <a:schemeClr val="accent1"/>
+          </a:fillRef>
+          <a:effectRef idx="2">
+            <a:schemeClr val="accent1"/>
+          </a:effectRef>
+          <a:fontRef idx="minor">
+            <a:schemeClr val="lt1"/>
+          </a:fontRef>
+        </p:style>
+        <p:txBody>
+          <a:bodyPr rtlCol="0" anchor="ctr"/>
+          <a:lstStyle/>
+          <a:p>
+            <a:pPr algn="ctr"/>
+          </a:p>
+        </p:txBody>
+      </p:sp>
+      <p:sp>
+        <p:nvSpPr>
+          <p:cNvPr id="9" name="Oval 8"/>
+          <p:cNvSpPr/>
+          <p:nvPr/>
+        </p:nvSpPr>
+        <p:spPr>
+          <a:xfrm>
+            <a:off x="6583680" y="1737360"/>
+            <a:ext cx="548640" cy="548640"/>
+          </a:xfrm>
+          <a:prstGeom prst="ellipse">
+            <a:avLst/>
+          </a:prstGeom>
+          <a:solidFill>
+            <a:srgbClr val="6C3CB0"/>
+          </a:solidFill>
+          <a:ln>
+            <a:noFill/>
+          </a:ln>
+        </p:spPr>
+        <p:style>
+          <a:lnRef idx="1">
+            <a:schemeClr val="accent1"/>
+          </a:lnRef>
+          <a:fillRef idx="3">
+            <a:schemeClr val="accent1"/>
+          </a:fillRef>
+          <a:effectRef idx="2">
+            <a:schemeClr val="accent1"/>
+          </a:effectRef>
+          <a:fontRef idx="minor">
+            <a:schemeClr val="lt1"/>
+          </a:fontRef>
+        </p:style>
+        <p:txBody>
+          <a:bodyPr rtlCol="0" anchor="ctr" wrap="none"/>
+          <a:lstStyle/>
+          <a:p>
+            <a:pPr algn="ctr">
+              <a:defRPr sz="600" b="1">
+                <a:solidFill>
+                  <a:srgbClr val="FFFFFF"/>
+                </a:solidFill>
+                <a:latin typeface="Calibri"/>
+              </a:defRPr>
+            </a:pPr>
+            <a:r>
+              <a:t>V</a:t>
+            </a:r>
+          </a:p>
+        </p:txBody>
+      </p:sp>
+      <p:sp>
+        <p:nvSpPr>
+          <p:cNvPr id="10" name="TextBox 9"/>
           <p:cNvSpPr txBox="1"/>
           <p:nvPr/>
         </p:nvSpPr>
         <p:spPr>
           <a:xfrm>
-            <a:off x="5943600" y="1645920"/>
-            <a:ext cx="5486400" cy="4572000"/>
+            <a:off x="7315200" y="1783080"/>
+            <a:ext cx="3657600" cy="457200"/>
+          </a:xfrm>
+          <a:prstGeom prst="rect">
+            <a:avLst/>
+          </a:prstGeom>
+          <a:noFill/>
+        </p:spPr>
+        <p:txBody>
+          <a:bodyPr wrap="square">
+            <a:spAutoFit/>
+          </a:bodyPr>
+          <a:lstStyle/>
+          <a:p>
+            <a:pPr algn="l">
+              <a:defRPr sz="2000" b="1">
+                <a:solidFill>
+                  <a:srgbClr val="6C3CB0"/>
+                </a:solidFill>
+                <a:latin typeface="Calibri"/>
+              </a:defRPr>
+            </a:pPr>
+            <a:r>
+              <a:t>Visualization &amp; Validation</a:t>
+            </a:r>
+          </a:p>
+        </p:txBody>
+      </p:sp>
+      <p:sp>
+        <p:nvSpPr>
+          <p:cNvPr id="11" name="TextBox 10"/>
+          <p:cNvSpPr txBox="1"/>
+          <p:nvPr/>
+        </p:nvSpPr>
+        <p:spPr>
+          <a:xfrm>
+            <a:off x="6583680" y="2468880"/>
+            <a:ext cx="4572000" cy="3200400"/>
           </a:xfrm>
           <a:prstGeom prst="rect">
             <a:avLst/>
@@ -4779,7 +5726,7 @@
               <a:spcAft>
                 <a:spcPts val="800"/>
               </a:spcAft>
-              <a:defRPr sz="1800">
+              <a:defRPr sz="1700">
                 <a:solidFill>
                   <a:srgbClr val="333333"/>
                 </a:solidFill>
@@ -4787,7 +5734,7 @@
               </a:defRPr>
             </a:pPr>
             <a:r>
-              <a:t>• Terminal bar chart with Unicode symbols</a:t>
+              <a:t>• Terminal bar chart (Unicode)</a:t>
             </a:r>
           </a:p>
           <a:p>
@@ -4795,7 +5742,7 @@
               <a:spcAft>
                 <a:spcPts val="800"/>
               </a:spcAft>
-              <a:defRPr sz="1800">
+              <a:defRPr sz="1700">
                 <a:solidFill>
                   <a:srgbClr val="333333"/>
                 </a:solidFill>
@@ -4803,7 +5750,7 @@
               </a:defRPr>
             </a:pPr>
             <a:r>
-              <a:t>• Matplotlib graphical chart with color coding</a:t>
+              <a:t>• Matplotlib graphical chart</a:t>
             </a:r>
           </a:p>
           <a:p>
@@ -4811,7 +5758,7 @@
               <a:spcAft>
                 <a:spcPts val="800"/>
               </a:spcAft>
-              <a:defRPr sz="1800">
+              <a:defRPr sz="1700">
                 <a:solidFill>
                   <a:srgbClr val="333333"/>
                 </a:solidFill>
@@ -4819,7 +5766,7 @@
               </a:defRPr>
             </a:pPr>
             <a:r>
-              <a:t>• Dynamic color palettes — unique shade per employee</a:t>
+              <a:t>• Unique color shade per employee</a:t>
             </a:r>
           </a:p>
           <a:p>
@@ -4827,7 +5774,7 @@
               <a:spcAft>
                 <a:spcPts val="800"/>
               </a:spcAft>
-              <a:defRPr sz="1800">
+              <a:defRPr sz="1700">
                 <a:solidFill>
                   <a:srgbClr val="333333"/>
                 </a:solidFill>
@@ -4835,7 +5782,7 @@
               </a:defRPr>
             </a:pPr>
             <a:r>
-              <a:t>• Duplicate prevention (same name + dept)</a:t>
+              <a:t>• Duplicate prevention</a:t>
             </a:r>
           </a:p>
           <a:p>
@@ -4843,7 +5790,7 @@
               <a:spcAft>
                 <a:spcPts val="800"/>
               </a:spcAft>
-              <a:defRPr sz="1800">
+              <a:defRPr sz="1700">
                 <a:solidFill>
                   <a:srgbClr val="333333"/>
                 </a:solidFill>
@@ -4851,7 +5798,7 @@
               </a:defRPr>
             </a:pPr>
             <a:r>
-              <a:t>• Input validation (alphanumeric names, non-negative tickets)</a:t>
+              <a:t>• Input validation (alphanumeric, non-negative)</a:t>
             </a:r>
           </a:p>
         </p:txBody>
@@ -4913,98 +5860,78 @@
               </a:defRPr>
             </a:pPr>
             <a:r>
-              <a:t>Tech Stack</a:t>
-            </a:r>
-          </a:p>
-        </p:txBody>
-      </p:sp>
-      <p:sp>
-        <p:nvSpPr>
-          <p:cNvPr id="3" name="TextBox 2"/>
-          <p:cNvSpPr txBox="1"/>
-          <p:nvPr/>
-        </p:nvSpPr>
-        <p:spPr>
-          <a:xfrm>
-            <a:off x="731520" y="1645920"/>
-            <a:ext cx="10058400" cy="4114800"/>
+              <a:t>Bar Chart Visualization</a:t>
+            </a:r>
+          </a:p>
+        </p:txBody>
+      </p:sp>
+      <p:sp>
+        <p:nvSpPr>
+          <p:cNvPr id="3" name="Rectangle 2"/>
+          <p:cNvSpPr/>
+          <p:nvPr/>
+        </p:nvSpPr>
+        <p:spPr>
+          <a:xfrm>
+            <a:off x="731520" y="1097280"/>
+            <a:ext cx="3200400" cy="38100"/>
           </a:xfrm>
           <a:prstGeom prst="rect">
             <a:avLst/>
           </a:prstGeom>
-          <a:noFill/>
-        </p:spPr>
-        <p:txBody>
-          <a:bodyPr wrap="square">
-            <a:spAutoFit/>
-          </a:bodyPr>
-          <a:lstStyle/>
-          <a:p>
-            <a:pPr>
-              <a:spcAft>
-                <a:spcPts val="800"/>
-              </a:spcAft>
-              <a:defRPr sz="2000">
-                <a:solidFill>
-                  <a:srgbClr val="333333"/>
-                </a:solidFill>
-                <a:latin typeface="Calibri"/>
-              </a:defRPr>
-            </a:pPr>
-            <a:r>
-              <a:t>• Python 3 — core language</a:t>
-            </a:r>
-          </a:p>
-          <a:p>
-            <a:pPr>
-              <a:spcAft>
-                <a:spcPts val="800"/>
-              </a:spcAft>
-              <a:defRPr sz="2000">
-                <a:solidFill>
-                  <a:srgbClr val="333333"/>
-                </a:solidFill>
-                <a:latin typeface="Calibri"/>
-              </a:defRPr>
-            </a:pPr>
-            <a:r>
-              <a:t>• matplotlib — graphical bar charts with color-coded department palettes</a:t>
-            </a:r>
-          </a:p>
-          <a:p>
-            <a:pPr>
-              <a:spcAft>
-                <a:spcPts val="800"/>
-              </a:spcAft>
-              <a:defRPr sz="2000">
-                <a:solidFill>
-                  <a:srgbClr val="333333"/>
-                </a:solidFill>
-                <a:latin typeface="Calibri"/>
-              </a:defRPr>
-            </a:pPr>
-            <a:r>
-              <a:t>• colorsys — built-in HSL-to-RGB color conversion for dynamic shading</a:t>
-            </a:r>
-          </a:p>
-          <a:p>
-            <a:pPr>
-              <a:spcAft>
-                <a:spcPts val="800"/>
-              </a:spcAft>
-              <a:defRPr sz="2000">
-                <a:solidFill>
-                  <a:srgbClr val="333333"/>
-                </a:solidFill>
-                <a:latin typeface="Calibri"/>
-              </a:defRPr>
-            </a:pPr>
-            <a:r>
-              <a:t>• In-memory storage — list of dictionaries (data resets on exit)</a:t>
-            </a:r>
-          </a:p>
-        </p:txBody>
-      </p:sp>
+          <a:solidFill>
+            <a:srgbClr val="1A56DB"/>
+          </a:solidFill>
+          <a:ln>
+            <a:noFill/>
+          </a:ln>
+        </p:spPr>
+        <p:style>
+          <a:lnRef idx="1">
+            <a:schemeClr val="accent1"/>
+          </a:lnRef>
+          <a:fillRef idx="3">
+            <a:schemeClr val="accent1"/>
+          </a:fillRef>
+          <a:effectRef idx="2">
+            <a:schemeClr val="accent1"/>
+          </a:effectRef>
+          <a:fontRef idx="minor">
+            <a:schemeClr val="lt1"/>
+          </a:fontRef>
+        </p:style>
+        <p:txBody>
+          <a:bodyPr rtlCol="0" anchor="ctr"/>
+          <a:lstStyle/>
+          <a:p>
+            <a:pPr algn="ctr"/>
+          </a:p>
+        </p:txBody>
+      </p:sp>
+      <p:pic>
+        <p:nvPicPr>
+          <p:cNvPr id="4" name="Picture 3" descr="Screenshot 2026-04-20 at 00.23.59.png"/>
+          <p:cNvPicPr>
+            <a:picLocks noChangeAspect="1"/>
+          </p:cNvPicPr>
+          <p:nvPr/>
+        </p:nvPicPr>
+        <p:blipFill>
+          <a:blip r:embed="rId2"/>
+          <a:stretch>
+            <a:fillRect/>
+          </a:stretch>
+        </p:blipFill>
+        <p:spPr>
+          <a:xfrm>
+            <a:off x="1371600" y="1463040"/>
+            <a:ext cx="9418320" cy="5029200"/>
+          </a:xfrm>
+          <a:prstGeom prst="rect">
+            <a:avLst/>
+          </a:prstGeom>
+        </p:spPr>
+      </p:pic>
     </p:spTree>
   </p:cSld>
   <p:clrMapOvr>
@@ -5062,21 +5989,162 @@
               </a:defRPr>
             </a:pPr>
             <a:r>
-              <a:t>Code Structure</a:t>
-            </a:r>
-          </a:p>
-        </p:txBody>
-      </p:sp>
-      <p:sp>
-        <p:nvSpPr>
-          <p:cNvPr id="3" name="TextBox 2"/>
+              <a:t>Tech Stack</a:t>
+            </a:r>
+          </a:p>
+        </p:txBody>
+      </p:sp>
+      <p:sp>
+        <p:nvSpPr>
+          <p:cNvPr id="3" name="Rectangle 2"/>
+          <p:cNvSpPr/>
+          <p:nvPr/>
+        </p:nvSpPr>
+        <p:spPr>
+          <a:xfrm>
+            <a:off x="731520" y="1097280"/>
+            <a:ext cx="2011680" cy="38100"/>
+          </a:xfrm>
+          <a:prstGeom prst="rect">
+            <a:avLst/>
+          </a:prstGeom>
+          <a:solidFill>
+            <a:srgbClr val="1A56DB"/>
+          </a:solidFill>
+          <a:ln>
+            <a:noFill/>
+          </a:ln>
+        </p:spPr>
+        <p:style>
+          <a:lnRef idx="1">
+            <a:schemeClr val="accent1"/>
+          </a:lnRef>
+          <a:fillRef idx="3">
+            <a:schemeClr val="accent1"/>
+          </a:fillRef>
+          <a:effectRef idx="2">
+            <a:schemeClr val="accent1"/>
+          </a:effectRef>
+          <a:fontRef idx="minor">
+            <a:schemeClr val="lt1"/>
+          </a:fontRef>
+        </p:style>
+        <p:txBody>
+          <a:bodyPr rtlCol="0" anchor="ctr"/>
+          <a:lstStyle/>
+          <a:p>
+            <a:pPr algn="ctr"/>
+          </a:p>
+        </p:txBody>
+      </p:sp>
+      <p:sp>
+        <p:nvSpPr>
+          <p:cNvPr id="4" name="Rounded Rectangle 3"/>
+          <p:cNvSpPr/>
+          <p:nvPr/>
+        </p:nvSpPr>
+        <p:spPr>
+          <a:xfrm>
+            <a:off x="731520" y="1645920"/>
+            <a:ext cx="2377440" cy="2926080"/>
+          </a:xfrm>
+          <a:prstGeom prst="roundRect">
+            <a:avLst/>
+          </a:prstGeom>
+          <a:solidFill>
+            <a:srgbClr val="E8F0FE"/>
+          </a:solidFill>
+          <a:ln w="19050">
+            <a:solidFill>
+              <a:srgbClr val="1A56DB"/>
+            </a:solidFill>
+          </a:ln>
+        </p:spPr>
+        <p:style>
+          <a:lnRef idx="1">
+            <a:schemeClr val="accent1"/>
+          </a:lnRef>
+          <a:fillRef idx="3">
+            <a:schemeClr val="accent1"/>
+          </a:fillRef>
+          <a:effectRef idx="2">
+            <a:schemeClr val="accent1"/>
+          </a:effectRef>
+          <a:fontRef idx="minor">
+            <a:schemeClr val="lt1"/>
+          </a:fontRef>
+        </p:style>
+        <p:txBody>
+          <a:bodyPr rtlCol="0" anchor="ctr"/>
+          <a:lstStyle/>
+          <a:p>
+            <a:pPr algn="ctr"/>
+          </a:p>
+        </p:txBody>
+      </p:sp>
+      <p:sp>
+        <p:nvSpPr>
+          <p:cNvPr id="5" name="Oval 4"/>
+          <p:cNvSpPr/>
+          <p:nvPr/>
+        </p:nvSpPr>
+        <p:spPr>
+          <a:xfrm>
+            <a:off x="1508760" y="1920240"/>
+            <a:ext cx="822960" cy="822960"/>
+          </a:xfrm>
+          <a:prstGeom prst="ellipse">
+            <a:avLst/>
+          </a:prstGeom>
+          <a:solidFill>
+            <a:srgbClr val="1A56DB"/>
+          </a:solidFill>
+          <a:ln>
+            <a:noFill/>
+          </a:ln>
+        </p:spPr>
+        <p:style>
+          <a:lnRef idx="1">
+            <a:schemeClr val="accent1"/>
+          </a:lnRef>
+          <a:fillRef idx="3">
+            <a:schemeClr val="accent1"/>
+          </a:fillRef>
+          <a:effectRef idx="2">
+            <a:schemeClr val="accent1"/>
+          </a:effectRef>
+          <a:fontRef idx="minor">
+            <a:schemeClr val="lt1"/>
+          </a:fontRef>
+        </p:style>
+        <p:txBody>
+          <a:bodyPr rtlCol="0" anchor="ctr" wrap="none"/>
+          <a:lstStyle/>
+          <a:p>
+            <a:pPr algn="ctr">
+              <a:defRPr sz="900" b="1">
+                <a:solidFill>
+                  <a:srgbClr val="FFFFFF"/>
+                </a:solidFill>
+                <a:latin typeface="Calibri"/>
+              </a:defRPr>
+            </a:pPr>
+            <a:r>
+              <a:t>Py</a:t>
+            </a:r>
+          </a:p>
+        </p:txBody>
+      </p:sp>
+      <p:sp>
+        <p:nvSpPr>
+          <p:cNvPr id="6" name="TextBox 5"/>
           <p:cNvSpPr txBox="1"/>
           <p:nvPr/>
         </p:nvSpPr>
         <p:spPr>
           <a:xfrm>
-            <a:off x="731520" y="1645920"/>
-            <a:ext cx="5029200" cy="4572000"/>
+            <a:off x="822960" y="3017520"/>
+            <a:ext cx="2194560" cy="457200"/>
           </a:xfrm>
           <a:prstGeom prst="rect">
             <a:avLst/>
@@ -5089,158 +6157,30 @@
           </a:bodyPr>
           <a:lstStyle/>
           <a:p>
-            <a:pPr>
-              <a:spcAft>
-                <a:spcPts val="800"/>
-              </a:spcAft>
-              <a:defRPr sz="1600">
-                <a:solidFill>
-                  <a:srgbClr val="333333"/>
-                </a:solidFill>
-                <a:latin typeface="Calibri"/>
-              </a:defRPr>
-            </a:pPr>
-            <a:r>
-              <a:t>Data Layer</a:t>
-            </a:r>
-          </a:p>
-          <a:p>
-            <a:pPr>
-              <a:spcAft>
-                <a:spcPts val="800"/>
-              </a:spcAft>
-              <a:defRPr sz="1600">
-                <a:solidFill>
-                  <a:srgbClr val="333333"/>
-                </a:solidFill>
-                <a:latin typeface="Calibri"/>
-              </a:defRPr>
-            </a:pPr>
-            <a:r>
-              <a:t>  • employees list (8 seed records)</a:t>
-            </a:r>
-          </a:p>
-          <a:p>
-            <a:pPr>
-              <a:spcAft>
-                <a:spcPts val="800"/>
-              </a:spcAft>
-              <a:defRPr sz="1600">
-                <a:solidFill>
-                  <a:srgbClr val="333333"/>
-                </a:solidFill>
-                <a:latin typeface="Calibri"/>
-              </a:defRPr>
-            </a:pPr>
-            <a:r>
-              <a:t>  • DEPARTMENTS constant</a:t>
-            </a:r>
-          </a:p>
-          <a:p>
-            <a:pPr>
-              <a:spcAft>
-                <a:spcPts val="800"/>
-              </a:spcAft>
-              <a:defRPr sz="1600">
-                <a:solidFill>
-                  <a:srgbClr val="333333"/>
-                </a:solidFill>
-                <a:latin typeface="Calibri"/>
-              </a:defRPr>
-            </a:pPr>
-            <a:r>
-              <a:t>  • get_next_id() for auto-incrementing IDs</a:t>
-            </a:r>
-          </a:p>
-          <a:p>
-            <a:pPr>
-              <a:spcAft>
-                <a:spcPts val="800"/>
-              </a:spcAft>
-              <a:defRPr sz="1600">
-                <a:solidFill>
-                  <a:srgbClr val="333333"/>
-                </a:solidFill>
-                <a:latin typeface="Calibri"/>
-              </a:defRPr>
-            </a:pPr>
-          </a:p>
-          <a:p>
-            <a:pPr>
-              <a:spcAft>
-                <a:spcPts val="800"/>
-              </a:spcAft>
-              <a:defRPr sz="1600">
-                <a:solidFill>
-                  <a:srgbClr val="333333"/>
-                </a:solidFill>
-                <a:latin typeface="Calibri"/>
-              </a:defRPr>
-            </a:pPr>
-            <a:r>
-              <a:t>Visualization Layer</a:t>
-            </a:r>
-          </a:p>
-          <a:p>
-            <a:pPr>
-              <a:spcAft>
-                <a:spcPts val="800"/>
-              </a:spcAft>
-              <a:defRPr sz="1600">
-                <a:solidFill>
-                  <a:srgbClr val="333333"/>
-                </a:solidFill>
-                <a:latin typeface="Calibri"/>
-              </a:defRPr>
-            </a:pPr>
-            <a:r>
-              <a:t>  • show_terminal_chart() — Unicode bar chart</a:t>
-            </a:r>
-          </a:p>
-          <a:p>
-            <a:pPr>
-              <a:spcAft>
-                <a:spcPts val="800"/>
-              </a:spcAft>
-              <a:defRPr sz="1600">
-                <a:solidFill>
-                  <a:srgbClr val="333333"/>
-                </a:solidFill>
-                <a:latin typeface="Calibri"/>
-              </a:defRPr>
-            </a:pPr>
-            <a:r>
-              <a:t>  • show_matplotlib_chart() — graphical chart</a:t>
-            </a:r>
-          </a:p>
-          <a:p>
-            <a:pPr>
-              <a:spcAft>
-                <a:spcPts val="800"/>
-              </a:spcAft>
-              <a:defRPr sz="1600">
-                <a:solidFill>
-                  <a:srgbClr val="333333"/>
-                </a:solidFill>
-                <a:latin typeface="Calibri"/>
-              </a:defRPr>
-            </a:pPr>
-            <a:r>
-              <a:t>  • generate_palette() — dynamic color shading</a:t>
-            </a:r>
-          </a:p>
-        </p:txBody>
-      </p:sp>
-      <p:sp>
-        <p:nvSpPr>
-          <p:cNvPr id="4" name="TextBox 3"/>
+            <a:pPr algn="ctr">
+              <a:defRPr sz="1800" b="1">
+                <a:solidFill>
+                  <a:srgbClr val="1E1E1E"/>
+                </a:solidFill>
+                <a:latin typeface="Calibri"/>
+              </a:defRPr>
+            </a:pPr>
+            <a:r>
+              <a:t>Python 3</a:t>
+            </a:r>
+          </a:p>
+        </p:txBody>
+      </p:sp>
+      <p:sp>
+        <p:nvSpPr>
+          <p:cNvPr id="7" name="TextBox 6"/>
           <p:cNvSpPr txBox="1"/>
           <p:nvPr/>
         </p:nvSpPr>
         <p:spPr>
           <a:xfrm>
-            <a:off x="5943600" y="1645920"/>
-            <a:ext cx="5486400" cy="4572000"/>
+            <a:off x="822960" y="3566160"/>
+            <a:ext cx="2194560" cy="457200"/>
           </a:xfrm>
           <a:prstGeom prst="rect">
             <a:avLst/>
@@ -5253,11 +6193,599 @@
           </a:bodyPr>
           <a:lstStyle/>
           <a:p>
-            <a:pPr>
-              <a:spcAft>
-                <a:spcPts val="800"/>
-              </a:spcAft>
-              <a:defRPr sz="1600">
+            <a:pPr algn="ctr">
+              <a:defRPr sz="1400" b="0">
+                <a:solidFill>
+                  <a:srgbClr val="666666"/>
+                </a:solidFill>
+                <a:latin typeface="Calibri"/>
+              </a:defRPr>
+            </a:pPr>
+            <a:r>
+              <a:t>Core language</a:t>
+            </a:r>
+          </a:p>
+        </p:txBody>
+      </p:sp>
+      <p:sp>
+        <p:nvSpPr>
+          <p:cNvPr id="8" name="Rounded Rectangle 7"/>
+          <p:cNvSpPr/>
+          <p:nvPr/>
+        </p:nvSpPr>
+        <p:spPr>
+          <a:xfrm>
+            <a:off x="3566160" y="1645920"/>
+            <a:ext cx="2377440" cy="2926080"/>
+          </a:xfrm>
+          <a:prstGeom prst="roundRect">
+            <a:avLst/>
+          </a:prstGeom>
+          <a:solidFill>
+            <a:srgbClr val="E8F0FE"/>
+          </a:solidFill>
+          <a:ln w="19050">
+            <a:solidFill>
+              <a:srgbClr val="1A56DB"/>
+            </a:solidFill>
+          </a:ln>
+        </p:spPr>
+        <p:style>
+          <a:lnRef idx="1">
+            <a:schemeClr val="accent1"/>
+          </a:lnRef>
+          <a:fillRef idx="3">
+            <a:schemeClr val="accent1"/>
+          </a:fillRef>
+          <a:effectRef idx="2">
+            <a:schemeClr val="accent1"/>
+          </a:effectRef>
+          <a:fontRef idx="minor">
+            <a:schemeClr val="lt1"/>
+          </a:fontRef>
+        </p:style>
+        <p:txBody>
+          <a:bodyPr rtlCol="0" anchor="ctr"/>
+          <a:lstStyle/>
+          <a:p>
+            <a:pPr algn="ctr"/>
+          </a:p>
+        </p:txBody>
+      </p:sp>
+      <p:sp>
+        <p:nvSpPr>
+          <p:cNvPr id="9" name="Oval 8"/>
+          <p:cNvSpPr/>
+          <p:nvPr/>
+        </p:nvSpPr>
+        <p:spPr>
+          <a:xfrm>
+            <a:off x="4343400" y="1920240"/>
+            <a:ext cx="822960" cy="822960"/>
+          </a:xfrm>
+          <a:prstGeom prst="ellipse">
+            <a:avLst/>
+          </a:prstGeom>
+          <a:solidFill>
+            <a:srgbClr val="167F3D"/>
+          </a:solidFill>
+          <a:ln>
+            <a:noFill/>
+          </a:ln>
+        </p:spPr>
+        <p:style>
+          <a:lnRef idx="1">
+            <a:schemeClr val="accent1"/>
+          </a:lnRef>
+          <a:fillRef idx="3">
+            <a:schemeClr val="accent1"/>
+          </a:fillRef>
+          <a:effectRef idx="2">
+            <a:schemeClr val="accent1"/>
+          </a:effectRef>
+          <a:fontRef idx="minor">
+            <a:schemeClr val="lt1"/>
+          </a:fontRef>
+        </p:style>
+        <p:txBody>
+          <a:bodyPr rtlCol="0" anchor="ctr" wrap="none"/>
+          <a:lstStyle/>
+          <a:p>
+            <a:pPr algn="ctr">
+              <a:defRPr sz="900" b="1">
+                <a:solidFill>
+                  <a:srgbClr val="FFFFFF"/>
+                </a:solidFill>
+                <a:latin typeface="Calibri"/>
+              </a:defRPr>
+            </a:pPr>
+            <a:r>
+              <a:t>SQ</a:t>
+            </a:r>
+          </a:p>
+        </p:txBody>
+      </p:sp>
+      <p:sp>
+        <p:nvSpPr>
+          <p:cNvPr id="10" name="TextBox 9"/>
+          <p:cNvSpPr txBox="1"/>
+          <p:nvPr/>
+        </p:nvSpPr>
+        <p:spPr>
+          <a:xfrm>
+            <a:off x="3657600" y="3017520"/>
+            <a:ext cx="2194560" cy="457200"/>
+          </a:xfrm>
+          <a:prstGeom prst="rect">
+            <a:avLst/>
+          </a:prstGeom>
+          <a:noFill/>
+        </p:spPr>
+        <p:txBody>
+          <a:bodyPr wrap="square">
+            <a:spAutoFit/>
+          </a:bodyPr>
+          <a:lstStyle/>
+          <a:p>
+            <a:pPr algn="ctr">
+              <a:defRPr sz="1800" b="1">
+                <a:solidFill>
+                  <a:srgbClr val="1E1E1E"/>
+                </a:solidFill>
+                <a:latin typeface="Calibri"/>
+              </a:defRPr>
+            </a:pPr>
+            <a:r>
+              <a:t>SQLite</a:t>
+            </a:r>
+          </a:p>
+        </p:txBody>
+      </p:sp>
+      <p:sp>
+        <p:nvSpPr>
+          <p:cNvPr id="11" name="TextBox 10"/>
+          <p:cNvSpPr txBox="1"/>
+          <p:nvPr/>
+        </p:nvSpPr>
+        <p:spPr>
+          <a:xfrm>
+            <a:off x="3657600" y="3566160"/>
+            <a:ext cx="2194560" cy="457200"/>
+          </a:xfrm>
+          <a:prstGeom prst="rect">
+            <a:avLst/>
+          </a:prstGeom>
+          <a:noFill/>
+        </p:spPr>
+        <p:txBody>
+          <a:bodyPr wrap="square">
+            <a:spAutoFit/>
+          </a:bodyPr>
+          <a:lstStyle/>
+          <a:p>
+            <a:pPr algn="ctr">
+              <a:defRPr sz="1400" b="0">
+                <a:solidFill>
+                  <a:srgbClr val="666666"/>
+                </a:solidFill>
+                <a:latin typeface="Calibri"/>
+              </a:defRPr>
+            </a:pPr>
+            <a:r>
+              <a:t>Persistent database</a:t>
+            </a:r>
+          </a:p>
+        </p:txBody>
+      </p:sp>
+      <p:sp>
+        <p:nvSpPr>
+          <p:cNvPr id="12" name="Rounded Rectangle 11"/>
+          <p:cNvSpPr/>
+          <p:nvPr/>
+        </p:nvSpPr>
+        <p:spPr>
+          <a:xfrm>
+            <a:off x="6400800" y="1645920"/>
+            <a:ext cx="2377440" cy="2926080"/>
+          </a:xfrm>
+          <a:prstGeom prst="roundRect">
+            <a:avLst/>
+          </a:prstGeom>
+          <a:solidFill>
+            <a:srgbClr val="E8F0FE"/>
+          </a:solidFill>
+          <a:ln w="19050">
+            <a:solidFill>
+              <a:srgbClr val="1A56DB"/>
+            </a:solidFill>
+          </a:ln>
+        </p:spPr>
+        <p:style>
+          <a:lnRef idx="1">
+            <a:schemeClr val="accent1"/>
+          </a:lnRef>
+          <a:fillRef idx="3">
+            <a:schemeClr val="accent1"/>
+          </a:fillRef>
+          <a:effectRef idx="2">
+            <a:schemeClr val="accent1"/>
+          </a:effectRef>
+          <a:fontRef idx="minor">
+            <a:schemeClr val="lt1"/>
+          </a:fontRef>
+        </p:style>
+        <p:txBody>
+          <a:bodyPr rtlCol="0" anchor="ctr"/>
+          <a:lstStyle/>
+          <a:p>
+            <a:pPr algn="ctr"/>
+          </a:p>
+        </p:txBody>
+      </p:sp>
+      <p:sp>
+        <p:nvSpPr>
+          <p:cNvPr id="13" name="Oval 12"/>
+          <p:cNvSpPr/>
+          <p:nvPr/>
+        </p:nvSpPr>
+        <p:spPr>
+          <a:xfrm>
+            <a:off x="7178040" y="1920240"/>
+            <a:ext cx="822960" cy="822960"/>
+          </a:xfrm>
+          <a:prstGeom prst="ellipse">
+            <a:avLst/>
+          </a:prstGeom>
+          <a:solidFill>
+            <a:srgbClr val="6C3CB0"/>
+          </a:solidFill>
+          <a:ln>
+            <a:noFill/>
+          </a:ln>
+        </p:spPr>
+        <p:style>
+          <a:lnRef idx="1">
+            <a:schemeClr val="accent1"/>
+          </a:lnRef>
+          <a:fillRef idx="3">
+            <a:schemeClr val="accent1"/>
+          </a:fillRef>
+          <a:effectRef idx="2">
+            <a:schemeClr val="accent1"/>
+          </a:effectRef>
+          <a:fontRef idx="minor">
+            <a:schemeClr val="lt1"/>
+          </a:fontRef>
+        </p:style>
+        <p:txBody>
+          <a:bodyPr rtlCol="0" anchor="ctr" wrap="none"/>
+          <a:lstStyle/>
+          <a:p>
+            <a:pPr algn="ctr">
+              <a:defRPr sz="900" b="1">
+                <a:solidFill>
+                  <a:srgbClr val="FFFFFF"/>
+                </a:solidFill>
+                <a:latin typeface="Calibri"/>
+              </a:defRPr>
+            </a:pPr>
+            <a:r>
+              <a:t>Mp</a:t>
+            </a:r>
+          </a:p>
+        </p:txBody>
+      </p:sp>
+      <p:sp>
+        <p:nvSpPr>
+          <p:cNvPr id="14" name="TextBox 13"/>
+          <p:cNvSpPr txBox="1"/>
+          <p:nvPr/>
+        </p:nvSpPr>
+        <p:spPr>
+          <a:xfrm>
+            <a:off x="6492240" y="3017520"/>
+            <a:ext cx="2194560" cy="457200"/>
+          </a:xfrm>
+          <a:prstGeom prst="rect">
+            <a:avLst/>
+          </a:prstGeom>
+          <a:noFill/>
+        </p:spPr>
+        <p:txBody>
+          <a:bodyPr wrap="square">
+            <a:spAutoFit/>
+          </a:bodyPr>
+          <a:lstStyle/>
+          <a:p>
+            <a:pPr algn="ctr">
+              <a:defRPr sz="1800" b="1">
+                <a:solidFill>
+                  <a:srgbClr val="1E1E1E"/>
+                </a:solidFill>
+                <a:latin typeface="Calibri"/>
+              </a:defRPr>
+            </a:pPr>
+            <a:r>
+              <a:t>matplotlib</a:t>
+            </a:r>
+          </a:p>
+        </p:txBody>
+      </p:sp>
+      <p:sp>
+        <p:nvSpPr>
+          <p:cNvPr id="15" name="TextBox 14"/>
+          <p:cNvSpPr txBox="1"/>
+          <p:nvPr/>
+        </p:nvSpPr>
+        <p:spPr>
+          <a:xfrm>
+            <a:off x="6492240" y="3566160"/>
+            <a:ext cx="2194560" cy="457200"/>
+          </a:xfrm>
+          <a:prstGeom prst="rect">
+            <a:avLst/>
+          </a:prstGeom>
+          <a:noFill/>
+        </p:spPr>
+        <p:txBody>
+          <a:bodyPr wrap="square">
+            <a:spAutoFit/>
+          </a:bodyPr>
+          <a:lstStyle/>
+          <a:p>
+            <a:pPr algn="ctr">
+              <a:defRPr sz="1400" b="0">
+                <a:solidFill>
+                  <a:srgbClr val="666666"/>
+                </a:solidFill>
+                <a:latin typeface="Calibri"/>
+              </a:defRPr>
+            </a:pPr>
+            <a:r>
+              <a:t>Graphical charts</a:t>
+            </a:r>
+          </a:p>
+        </p:txBody>
+      </p:sp>
+      <p:sp>
+        <p:nvSpPr>
+          <p:cNvPr id="16" name="Rounded Rectangle 15"/>
+          <p:cNvSpPr/>
+          <p:nvPr/>
+        </p:nvSpPr>
+        <p:spPr>
+          <a:xfrm>
+            <a:off x="9235440" y="1645920"/>
+            <a:ext cx="2377440" cy="2926080"/>
+          </a:xfrm>
+          <a:prstGeom prst="roundRect">
+            <a:avLst/>
+          </a:prstGeom>
+          <a:solidFill>
+            <a:srgbClr val="E8F0FE"/>
+          </a:solidFill>
+          <a:ln w="19050">
+            <a:solidFill>
+              <a:srgbClr val="1A56DB"/>
+            </a:solidFill>
+          </a:ln>
+        </p:spPr>
+        <p:style>
+          <a:lnRef idx="1">
+            <a:schemeClr val="accent1"/>
+          </a:lnRef>
+          <a:fillRef idx="3">
+            <a:schemeClr val="accent1"/>
+          </a:fillRef>
+          <a:effectRef idx="2">
+            <a:schemeClr val="accent1"/>
+          </a:effectRef>
+          <a:fontRef idx="minor">
+            <a:schemeClr val="lt1"/>
+          </a:fontRef>
+        </p:style>
+        <p:txBody>
+          <a:bodyPr rtlCol="0" anchor="ctr"/>
+          <a:lstStyle/>
+          <a:p>
+            <a:pPr algn="ctr"/>
+          </a:p>
+        </p:txBody>
+      </p:sp>
+      <p:sp>
+        <p:nvSpPr>
+          <p:cNvPr id="17" name="Oval 16"/>
+          <p:cNvSpPr/>
+          <p:nvPr/>
+        </p:nvSpPr>
+        <p:spPr>
+          <a:xfrm>
+            <a:off x="10012680" y="1920240"/>
+            <a:ext cx="822960" cy="822960"/>
+          </a:xfrm>
+          <a:prstGeom prst="ellipse">
+            <a:avLst/>
+          </a:prstGeom>
+          <a:solidFill>
+            <a:srgbClr val="B8860B"/>
+          </a:solidFill>
+          <a:ln>
+            <a:noFill/>
+          </a:ln>
+        </p:spPr>
+        <p:style>
+          <a:lnRef idx="1">
+            <a:schemeClr val="accent1"/>
+          </a:lnRef>
+          <a:fillRef idx="3">
+            <a:schemeClr val="accent1"/>
+          </a:fillRef>
+          <a:effectRef idx="2">
+            <a:schemeClr val="accent1"/>
+          </a:effectRef>
+          <a:fontRef idx="minor">
+            <a:schemeClr val="lt1"/>
+          </a:fontRef>
+        </p:style>
+        <p:txBody>
+          <a:bodyPr rtlCol="0" anchor="ctr" wrap="none"/>
+          <a:lstStyle/>
+          <a:p>
+            <a:pPr algn="ctr">
+              <a:defRPr sz="900" b="1">
+                <a:solidFill>
+                  <a:srgbClr val="FFFFFF"/>
+                </a:solidFill>
+                <a:latin typeface="Calibri"/>
+              </a:defRPr>
+            </a:pPr>
+            <a:r>
+              <a:t>Cs</a:t>
+            </a:r>
+          </a:p>
+        </p:txBody>
+      </p:sp>
+      <p:sp>
+        <p:nvSpPr>
+          <p:cNvPr id="18" name="TextBox 17"/>
+          <p:cNvSpPr txBox="1"/>
+          <p:nvPr/>
+        </p:nvSpPr>
+        <p:spPr>
+          <a:xfrm>
+            <a:off x="9326880" y="3017520"/>
+            <a:ext cx="2194560" cy="457200"/>
+          </a:xfrm>
+          <a:prstGeom prst="rect">
+            <a:avLst/>
+          </a:prstGeom>
+          <a:noFill/>
+        </p:spPr>
+        <p:txBody>
+          <a:bodyPr wrap="square">
+            <a:spAutoFit/>
+          </a:bodyPr>
+          <a:lstStyle/>
+          <a:p>
+            <a:pPr algn="ctr">
+              <a:defRPr sz="1800" b="1">
+                <a:solidFill>
+                  <a:srgbClr val="1E1E1E"/>
+                </a:solidFill>
+                <a:latin typeface="Calibri"/>
+              </a:defRPr>
+            </a:pPr>
+            <a:r>
+              <a:t>colorsys</a:t>
+            </a:r>
+          </a:p>
+        </p:txBody>
+      </p:sp>
+      <p:sp>
+        <p:nvSpPr>
+          <p:cNvPr id="19" name="TextBox 18"/>
+          <p:cNvSpPr txBox="1"/>
+          <p:nvPr/>
+        </p:nvSpPr>
+        <p:spPr>
+          <a:xfrm>
+            <a:off x="9326880" y="3566160"/>
+            <a:ext cx="2194560" cy="457200"/>
+          </a:xfrm>
+          <a:prstGeom prst="rect">
+            <a:avLst/>
+          </a:prstGeom>
+          <a:noFill/>
+        </p:spPr>
+        <p:txBody>
+          <a:bodyPr wrap="square">
+            <a:spAutoFit/>
+          </a:bodyPr>
+          <a:lstStyle/>
+          <a:p>
+            <a:pPr algn="ctr">
+              <a:defRPr sz="1400" b="0">
+                <a:solidFill>
+                  <a:srgbClr val="666666"/>
+                </a:solidFill>
+                <a:latin typeface="Calibri"/>
+              </a:defRPr>
+            </a:pPr>
+            <a:r>
+              <a:t>HSL color palettes</a:t>
+            </a:r>
+          </a:p>
+        </p:txBody>
+      </p:sp>
+      <p:sp>
+        <p:nvSpPr>
+          <p:cNvPr id="20" name="Rounded Rectangle 19"/>
+          <p:cNvSpPr/>
+          <p:nvPr/>
+        </p:nvSpPr>
+        <p:spPr>
+          <a:xfrm>
+            <a:off x="3566160" y="4846320"/>
+            <a:ext cx="5029200" cy="1097280"/>
+          </a:xfrm>
+          <a:prstGeom prst="roundRect">
+            <a:avLst/>
+          </a:prstGeom>
+          <a:solidFill>
+            <a:srgbClr val="E8F0FE"/>
+          </a:solidFill>
+          <a:ln w="19050">
+            <a:solidFill>
+              <a:srgbClr val="1A56DB"/>
+            </a:solidFill>
+          </a:ln>
+        </p:spPr>
+        <p:style>
+          <a:lnRef idx="1">
+            <a:schemeClr val="accent1"/>
+          </a:lnRef>
+          <a:fillRef idx="3">
+            <a:schemeClr val="accent1"/>
+          </a:fillRef>
+          <a:effectRef idx="2">
+            <a:schemeClr val="accent1"/>
+          </a:effectRef>
+          <a:fontRef idx="minor">
+            <a:schemeClr val="lt1"/>
+          </a:fontRef>
+        </p:style>
+        <p:txBody>
+          <a:bodyPr rtlCol="0" anchor="ctr"/>
+          <a:lstStyle/>
+          <a:p>
+            <a:pPr algn="ctr"/>
+          </a:p>
+        </p:txBody>
+      </p:sp>
+      <p:sp>
+        <p:nvSpPr>
+          <p:cNvPr id="21" name="TextBox 20"/>
+          <p:cNvSpPr txBox="1"/>
+          <p:nvPr/>
+        </p:nvSpPr>
+        <p:spPr>
+          <a:xfrm>
+            <a:off x="3749039" y="5029200"/>
+            <a:ext cx="4663440" cy="365760"/>
+          </a:xfrm>
+          <a:prstGeom prst="rect">
+            <a:avLst/>
+          </a:prstGeom>
+          <a:noFill/>
+        </p:spPr>
+        <p:txBody>
+          <a:bodyPr wrap="square">
+            <a:spAutoFit/>
+          </a:bodyPr>
+          <a:lstStyle/>
+          <a:p>
+            <a:pPr algn="ctr">
+              <a:defRPr sz="1600" b="1">
                 <a:solidFill>
                   <a:srgbClr val="333333"/>
                 </a:solidFill>
@@ -5265,161 +6793,43 @@
               </a:defRPr>
             </a:pPr>
             <a:r>
-              <a:t>CRUD Functions</a:t>
-            </a:r>
-          </a:p>
-          <a:p>
-            <a:pPr>
-              <a:spcAft>
-                <a:spcPts val="800"/>
-              </a:spcAft>
-              <a:defRPr sz="1600">
-                <a:solidFill>
-                  <a:srgbClr val="333333"/>
-                </a:solidFill>
-                <a:latin typeface="Calibri"/>
-              </a:defRPr>
-            </a:pPr>
-            <a:r>
-              <a:t>  • create_employee() — with full validation</a:t>
-            </a:r>
-          </a:p>
-          <a:p>
-            <a:pPr>
-              <a:spcAft>
-                <a:spcPts val="800"/>
-              </a:spcAft>
-              <a:defRPr sz="1600">
-                <a:solidFill>
-                  <a:srgbClr val="333333"/>
-                </a:solidFill>
-                <a:latin typeface="Calibri"/>
-              </a:defRPr>
-            </a:pPr>
-            <a:r>
-              <a:t>  • update_employee() — partial updates supported</a:t>
-            </a:r>
-          </a:p>
-          <a:p>
-            <a:pPr>
-              <a:spcAft>
-                <a:spcPts val="800"/>
-              </a:spcAft>
-              <a:defRPr sz="1600">
-                <a:solidFill>
-                  <a:srgbClr val="333333"/>
-                </a:solidFill>
-                <a:latin typeface="Calibri"/>
-              </a:defRPr>
-            </a:pPr>
-            <a:r>
-              <a:t>  • delete_employee() — with confirmation</a:t>
-            </a:r>
-          </a:p>
-          <a:p>
-            <a:pPr>
-              <a:spcAft>
-                <a:spcPts val="800"/>
-              </a:spcAft>
-              <a:defRPr sz="1600">
-                <a:solidFill>
-                  <a:srgbClr val="333333"/>
-                </a:solidFill>
-                <a:latin typeface="Calibri"/>
-              </a:defRPr>
-            </a:pPr>
-          </a:p>
-          <a:p>
-            <a:pPr>
-              <a:spcAft>
-                <a:spcPts val="800"/>
-              </a:spcAft>
-              <a:defRPr sz="1600">
-                <a:solidFill>
-                  <a:srgbClr val="333333"/>
-                </a:solidFill>
-                <a:latin typeface="Calibri"/>
-              </a:defRPr>
-            </a:pPr>
-            <a:r>
-              <a:t>  • search_employee() — partial name match</a:t>
-            </a:r>
-          </a:p>
-          <a:p>
-            <a:pPr>
-              <a:spcAft>
-                <a:spcPts val="800"/>
-              </a:spcAft>
-              <a:defRPr sz="1600">
-                <a:solidFill>
-                  <a:srgbClr val="333333"/>
-                </a:solidFill>
-                <a:latin typeface="Calibri"/>
-              </a:defRPr>
-            </a:pPr>
-          </a:p>
-          <a:p>
-            <a:pPr>
-              <a:spcAft>
-                <a:spcPts val="800"/>
-              </a:spcAft>
-              <a:defRPr sz="1600">
-                <a:solidFill>
-                  <a:srgbClr val="333333"/>
-                </a:solidFill>
-                <a:latin typeface="Calibri"/>
-              </a:defRPr>
-            </a:pPr>
-            <a:r>
-              <a:t>Display &amp; Menu</a:t>
-            </a:r>
-          </a:p>
-          <a:p>
-            <a:pPr>
-              <a:spcAft>
-                <a:spcPts val="800"/>
-              </a:spcAft>
-              <a:defRPr sz="1600">
-                <a:solidFill>
-                  <a:srgbClr val="333333"/>
-                </a:solidFill>
-                <a:latin typeface="Calibri"/>
-              </a:defRPr>
-            </a:pPr>
-            <a:r>
-              <a:t>  • display_records() — ranked table output</a:t>
-            </a:r>
-          </a:p>
-          <a:p>
-            <a:pPr>
-              <a:spcAft>
-                <a:spcPts val="800"/>
-              </a:spcAft>
-              <a:defRPr sz="1600">
-                <a:solidFill>
-                  <a:srgbClr val="333333"/>
-                </a:solidFill>
-                <a:latin typeface="Calibri"/>
-              </a:defRPr>
-            </a:pPr>
-            <a:r>
-              <a:t>  • view_all() / view_by_department()</a:t>
-            </a:r>
-          </a:p>
-          <a:p>
-            <a:pPr>
-              <a:spcAft>
-                <a:spcPts val="800"/>
-              </a:spcAft>
-              <a:defRPr sz="1600">
-                <a:solidFill>
-                  <a:srgbClr val="333333"/>
-                </a:solidFill>
-                <a:latin typeface="Calibri"/>
-              </a:defRPr>
-            </a:pPr>
-            <a:r>
-              <a:t>  • main() — while loop menu (options 1-7)</a:t>
+              <a:t>unittest — 33 automated tests</a:t>
+            </a:r>
+          </a:p>
+        </p:txBody>
+      </p:sp>
+      <p:sp>
+        <p:nvSpPr>
+          <p:cNvPr id="22" name="TextBox 21"/>
+          <p:cNvSpPr txBox="1"/>
+          <p:nvPr/>
+        </p:nvSpPr>
+        <p:spPr>
+          <a:xfrm>
+            <a:off x="3749039" y="5440680"/>
+            <a:ext cx="4663440" cy="365760"/>
+          </a:xfrm>
+          <a:prstGeom prst="rect">
+            <a:avLst/>
+          </a:prstGeom>
+          <a:noFill/>
+        </p:spPr>
+        <p:txBody>
+          <a:bodyPr wrap="square">
+            <a:spAutoFit/>
+          </a:bodyPr>
+          <a:lstStyle/>
+          <a:p>
+            <a:pPr algn="ctr">
+              <a:defRPr sz="1300" b="0">
+                <a:solidFill>
+                  <a:srgbClr val="666666"/>
+                </a:solidFill>
+                <a:latin typeface="Calibri"/>
+              </a:defRPr>
+            </a:pPr>
+            <a:r>
+              <a:t>Built-in Python testing framework</a:t>
             </a:r>
           </a:p>
         </p:txBody>
@@ -5481,21 +6891,198 @@
               </a:defRPr>
             </a:pPr>
             <a:r>
-              <a:t>Key Python Concepts Used</a:t>
-            </a:r>
-          </a:p>
-        </p:txBody>
-      </p:sp>
-      <p:sp>
-        <p:nvSpPr>
-          <p:cNvPr id="3" name="TextBox 2"/>
+              <a:t>Code Structure — Modularized</a:t>
+            </a:r>
+          </a:p>
+        </p:txBody>
+      </p:sp>
+      <p:sp>
+        <p:nvSpPr>
+          <p:cNvPr id="3" name="Rectangle 2"/>
+          <p:cNvSpPr/>
+          <p:nvPr/>
+        </p:nvSpPr>
+        <p:spPr>
+          <a:xfrm>
+            <a:off x="731520" y="1097280"/>
+            <a:ext cx="4114800" cy="38100"/>
+          </a:xfrm>
+          <a:prstGeom prst="rect">
+            <a:avLst/>
+          </a:prstGeom>
+          <a:solidFill>
+            <a:srgbClr val="1A56DB"/>
+          </a:solidFill>
+          <a:ln>
+            <a:noFill/>
+          </a:ln>
+        </p:spPr>
+        <p:style>
+          <a:lnRef idx="1">
+            <a:schemeClr val="accent1"/>
+          </a:lnRef>
+          <a:fillRef idx="3">
+            <a:schemeClr val="accent1"/>
+          </a:fillRef>
+          <a:effectRef idx="2">
+            <a:schemeClr val="accent1"/>
+          </a:effectRef>
+          <a:fontRef idx="minor">
+            <a:schemeClr val="lt1"/>
+          </a:fontRef>
+        </p:style>
+        <p:txBody>
+          <a:bodyPr rtlCol="0" anchor="ctr"/>
+          <a:lstStyle/>
+          <a:p>
+            <a:pPr algn="ctr"/>
+          </a:p>
+        </p:txBody>
+      </p:sp>
+      <p:sp>
+        <p:nvSpPr>
+          <p:cNvPr id="4" name="Rounded Rectangle 3"/>
+          <p:cNvSpPr/>
+          <p:nvPr/>
+        </p:nvSpPr>
+        <p:spPr>
+          <a:xfrm>
+            <a:off x="548640" y="1463040"/>
+            <a:ext cx="3474720" cy="4754880"/>
+          </a:xfrm>
+          <a:prstGeom prst="roundRect">
+            <a:avLst/>
+          </a:prstGeom>
+          <a:solidFill>
+            <a:srgbClr val="E8F0FE"/>
+          </a:solidFill>
+          <a:ln w="19050">
+            <a:solidFill>
+              <a:srgbClr val="1A56DB"/>
+            </a:solidFill>
+          </a:ln>
+        </p:spPr>
+        <p:style>
+          <a:lnRef idx="1">
+            <a:schemeClr val="accent1"/>
+          </a:lnRef>
+          <a:fillRef idx="3">
+            <a:schemeClr val="accent1"/>
+          </a:fillRef>
+          <a:effectRef idx="2">
+            <a:schemeClr val="accent1"/>
+          </a:effectRef>
+          <a:fontRef idx="minor">
+            <a:schemeClr val="lt1"/>
+          </a:fontRef>
+        </p:style>
+        <p:txBody>
+          <a:bodyPr rtlCol="0" anchor="ctr"/>
+          <a:lstStyle/>
+          <a:p>
+            <a:pPr algn="ctr"/>
+          </a:p>
+        </p:txBody>
+      </p:sp>
+      <p:sp>
+        <p:nvSpPr>
+          <p:cNvPr id="5" name="Oval 4"/>
+          <p:cNvSpPr/>
+          <p:nvPr/>
+        </p:nvSpPr>
+        <p:spPr>
+          <a:xfrm>
+            <a:off x="914400" y="1737360"/>
+            <a:ext cx="502920" cy="502920"/>
+          </a:xfrm>
+          <a:prstGeom prst="ellipse">
+            <a:avLst/>
+          </a:prstGeom>
+          <a:solidFill>
+            <a:srgbClr val="167F3D"/>
+          </a:solidFill>
+          <a:ln>
+            <a:noFill/>
+          </a:ln>
+        </p:spPr>
+        <p:style>
+          <a:lnRef idx="1">
+            <a:schemeClr val="accent1"/>
+          </a:lnRef>
+          <a:fillRef idx="3">
+            <a:schemeClr val="accent1"/>
+          </a:fillRef>
+          <a:effectRef idx="2">
+            <a:schemeClr val="accent1"/>
+          </a:effectRef>
+          <a:fontRef idx="minor">
+            <a:schemeClr val="lt1"/>
+          </a:fontRef>
+        </p:style>
+        <p:txBody>
+          <a:bodyPr rtlCol="0" anchor="ctr" wrap="none"/>
+          <a:lstStyle/>
+          <a:p>
+            <a:pPr algn="ctr">
+              <a:defRPr sz="600" b="1">
+                <a:solidFill>
+                  <a:srgbClr val="FFFFFF"/>
+                </a:solidFill>
+                <a:latin typeface="Calibri"/>
+              </a:defRPr>
+            </a:pPr>
+            <a:r>
+              <a:t>DB</a:t>
+            </a:r>
+          </a:p>
+        </p:txBody>
+      </p:sp>
+      <p:sp>
+        <p:nvSpPr>
+          <p:cNvPr id="6" name="TextBox 5"/>
           <p:cNvSpPr txBox="1"/>
           <p:nvPr/>
         </p:nvSpPr>
         <p:spPr>
           <a:xfrm>
-            <a:off x="731520" y="1645920"/>
-            <a:ext cx="5029200" cy="4572000"/>
+            <a:off x="1554480" y="1783080"/>
+            <a:ext cx="2286000" cy="457200"/>
+          </a:xfrm>
+          <a:prstGeom prst="rect">
+            <a:avLst/>
+          </a:prstGeom>
+          <a:noFill/>
+        </p:spPr>
+        <p:txBody>
+          <a:bodyPr wrap="square">
+            <a:spAutoFit/>
+          </a:bodyPr>
+          <a:lstStyle/>
+          <a:p>
+            <a:pPr algn="l">
+              <a:defRPr sz="1800" b="1">
+                <a:solidFill>
+                  <a:srgbClr val="167F3D"/>
+                </a:solidFill>
+                <a:latin typeface="Calibri"/>
+              </a:defRPr>
+            </a:pPr>
+            <a:r>
+              <a:t>database.py</a:t>
+            </a:r>
+          </a:p>
+        </p:txBody>
+      </p:sp>
+      <p:sp>
+        <p:nvSpPr>
+          <p:cNvPr id="7" name="TextBox 6"/>
+          <p:cNvSpPr txBox="1"/>
+          <p:nvPr/>
+        </p:nvSpPr>
+        <p:spPr>
+          <a:xfrm>
+            <a:off x="822960" y="2468880"/>
+            <a:ext cx="3017520" cy="3657600"/>
           </a:xfrm>
           <a:prstGeom prst="rect">
             <a:avLst/>
@@ -5512,7 +7099,7 @@
               <a:spcAft>
                 <a:spcPts val="800"/>
               </a:spcAft>
-              <a:defRPr sz="2000">
+              <a:defRPr sz="1500">
                 <a:solidFill>
                   <a:srgbClr val="333333"/>
                 </a:solidFill>
@@ -5520,7 +7107,7 @@
               </a:defRPr>
             </a:pPr>
             <a:r>
-              <a:t>• Lists and dictionaries</a:t>
+              <a:t>• SQLite init + seeding</a:t>
             </a:r>
           </a:p>
           <a:p>
@@ -5528,7 +7115,7 @@
               <a:spcAft>
                 <a:spcPts val="800"/>
               </a:spcAft>
-              <a:defRPr sz="2000">
+              <a:defRPr sz="1500">
                 <a:solidFill>
                   <a:srgbClr val="333333"/>
                 </a:solidFill>
@@ -5536,7 +7123,7 @@
               </a:defRPr>
             </a:pPr>
             <a:r>
-              <a:t>• Functions with parameters and return values</a:t>
+              <a:t>• get_all / get_by_id</a:t>
             </a:r>
           </a:p>
           <a:p>
@@ -5544,7 +7131,7 @@
               <a:spcAft>
                 <a:spcPts val="800"/>
               </a:spcAft>
-              <a:defRPr sz="2000">
+              <a:defRPr sz="1500">
                 <a:solidFill>
                   <a:srgbClr val="333333"/>
                 </a:solidFill>
@@ -5552,7 +7139,7 @@
               </a:defRPr>
             </a:pPr>
             <a:r>
-              <a:t>• Global variables and scope</a:t>
+              <a:t>• get_by_department</a:t>
             </a:r>
           </a:p>
           <a:p>
@@ -5560,7 +7147,7 @@
               <a:spcAft>
                 <a:spcPts val="800"/>
               </a:spcAft>
-              <a:defRPr sz="2000">
+              <a:defRPr sz="1500">
                 <a:solidFill>
                   <a:srgbClr val="333333"/>
                 </a:solidFill>
@@ -5568,7 +7155,7 @@
               </a:defRPr>
             </a:pPr>
             <a:r>
-              <a:t>• While loops and conditionals</a:t>
+              <a:t>• search_by_name</a:t>
             </a:r>
           </a:p>
           <a:p>
@@ -5576,7 +7163,7 @@
               <a:spcAft>
                 <a:spcPts val="800"/>
               </a:spcAft>
-              <a:defRPr sz="2000">
+              <a:defRPr sz="1500">
                 <a:solidFill>
                   <a:srgbClr val="333333"/>
                 </a:solidFill>
@@ -5584,38 +7171,15 @@
               </a:defRPr>
             </a:pPr>
             <a:r>
-              <a:t>• String formatting (f-strings)</a:t>
-            </a:r>
-          </a:p>
-        </p:txBody>
-      </p:sp>
-      <p:sp>
-        <p:nvSpPr>
-          <p:cNvPr id="4" name="TextBox 3"/>
-          <p:cNvSpPr txBox="1"/>
-          <p:nvPr/>
-        </p:nvSpPr>
-        <p:spPr>
-          <a:xfrm>
-            <a:off x="5943600" y="1645920"/>
-            <a:ext cx="5486400" cy="4572000"/>
-          </a:xfrm>
-          <a:prstGeom prst="rect">
-            <a:avLst/>
-          </a:prstGeom>
-          <a:noFill/>
-        </p:spPr>
-        <p:txBody>
-          <a:bodyPr wrap="square">
-            <a:spAutoFit/>
-          </a:bodyPr>
-          <a:lstStyle/>
+              <a:t>• create / update / delete</a:t>
+            </a:r>
+          </a:p>
           <a:p>
             <a:pPr>
               <a:spcAft>
                 <a:spcPts val="800"/>
               </a:spcAft>
-              <a:defRPr sz="2000">
+              <a:defRPr sz="1500">
                 <a:solidFill>
                   <a:srgbClr val="333333"/>
                 </a:solidFill>
@@ -5623,15 +7187,172 @@
               </a:defRPr>
             </a:pPr>
             <a:r>
-              <a:t>• Input validation and error handling (try/except)</a:t>
-            </a:r>
-          </a:p>
+              <a:t>• has_duplicate</a:t>
+            </a:r>
+          </a:p>
+        </p:txBody>
+      </p:sp>
+      <p:sp>
+        <p:nvSpPr>
+          <p:cNvPr id="8" name="Rounded Rectangle 7"/>
+          <p:cNvSpPr/>
+          <p:nvPr/>
+        </p:nvSpPr>
+        <p:spPr>
+          <a:xfrm>
+            <a:off x="4389120" y="1463040"/>
+            <a:ext cx="3474720" cy="4754880"/>
+          </a:xfrm>
+          <a:prstGeom prst="roundRect">
+            <a:avLst/>
+          </a:prstGeom>
+          <a:solidFill>
+            <a:srgbClr val="E8F0FE"/>
+          </a:solidFill>
+          <a:ln w="19050">
+            <a:solidFill>
+              <a:srgbClr val="6C3CB0"/>
+            </a:solidFill>
+          </a:ln>
+        </p:spPr>
+        <p:style>
+          <a:lnRef idx="1">
+            <a:schemeClr val="accent1"/>
+          </a:lnRef>
+          <a:fillRef idx="3">
+            <a:schemeClr val="accent1"/>
+          </a:fillRef>
+          <a:effectRef idx="2">
+            <a:schemeClr val="accent1"/>
+          </a:effectRef>
+          <a:fontRef idx="minor">
+            <a:schemeClr val="lt1"/>
+          </a:fontRef>
+        </p:style>
+        <p:txBody>
+          <a:bodyPr rtlCol="0" anchor="ctr"/>
+          <a:lstStyle/>
+          <a:p>
+            <a:pPr algn="ctr"/>
+          </a:p>
+        </p:txBody>
+      </p:sp>
+      <p:sp>
+        <p:nvSpPr>
+          <p:cNvPr id="9" name="Oval 8"/>
+          <p:cNvSpPr/>
+          <p:nvPr/>
+        </p:nvSpPr>
+        <p:spPr>
+          <a:xfrm>
+            <a:off x="4754880" y="1737360"/>
+            <a:ext cx="502920" cy="502920"/>
+          </a:xfrm>
+          <a:prstGeom prst="ellipse">
+            <a:avLst/>
+          </a:prstGeom>
+          <a:solidFill>
+            <a:srgbClr val="6C3CB0"/>
+          </a:solidFill>
+          <a:ln>
+            <a:noFill/>
+          </a:ln>
+        </p:spPr>
+        <p:style>
+          <a:lnRef idx="1">
+            <a:schemeClr val="accent1"/>
+          </a:lnRef>
+          <a:fillRef idx="3">
+            <a:schemeClr val="accent1"/>
+          </a:fillRef>
+          <a:effectRef idx="2">
+            <a:schemeClr val="accent1"/>
+          </a:effectRef>
+          <a:fontRef idx="minor">
+            <a:schemeClr val="lt1"/>
+          </a:fontRef>
+        </p:style>
+        <p:txBody>
+          <a:bodyPr rtlCol="0" anchor="ctr" wrap="none"/>
+          <a:lstStyle/>
+          <a:p>
+            <a:pPr algn="ctr">
+              <a:defRPr sz="600" b="1">
+                <a:solidFill>
+                  <a:srgbClr val="FFFFFF"/>
+                </a:solidFill>
+                <a:latin typeface="Calibri"/>
+              </a:defRPr>
+            </a:pPr>
+            <a:r>
+              <a:t>Ch</a:t>
+            </a:r>
+          </a:p>
+        </p:txBody>
+      </p:sp>
+      <p:sp>
+        <p:nvSpPr>
+          <p:cNvPr id="10" name="TextBox 9"/>
+          <p:cNvSpPr txBox="1"/>
+          <p:nvPr/>
+        </p:nvSpPr>
+        <p:spPr>
+          <a:xfrm>
+            <a:off x="5394960" y="1783080"/>
+            <a:ext cx="2286000" cy="457200"/>
+          </a:xfrm>
+          <a:prstGeom prst="rect">
+            <a:avLst/>
+          </a:prstGeom>
+          <a:noFill/>
+        </p:spPr>
+        <p:txBody>
+          <a:bodyPr wrap="square">
+            <a:spAutoFit/>
+          </a:bodyPr>
+          <a:lstStyle/>
+          <a:p>
+            <a:pPr algn="l">
+              <a:defRPr sz="1800" b="1">
+                <a:solidFill>
+                  <a:srgbClr val="6C3CB0"/>
+                </a:solidFill>
+                <a:latin typeface="Calibri"/>
+              </a:defRPr>
+            </a:pPr>
+            <a:r>
+              <a:t>charts.py</a:t>
+            </a:r>
+          </a:p>
+        </p:txBody>
+      </p:sp>
+      <p:sp>
+        <p:nvSpPr>
+          <p:cNvPr id="11" name="TextBox 10"/>
+          <p:cNvSpPr txBox="1"/>
+          <p:nvPr/>
+        </p:nvSpPr>
+        <p:spPr>
+          <a:xfrm>
+            <a:off x="4663440" y="2468880"/>
+            <a:ext cx="3017520" cy="3657600"/>
+          </a:xfrm>
+          <a:prstGeom prst="rect">
+            <a:avLst/>
+          </a:prstGeom>
+          <a:noFill/>
+        </p:spPr>
+        <p:txBody>
+          <a:bodyPr wrap="square">
+            <a:spAutoFit/>
+          </a:bodyPr>
+          <a:lstStyle/>
           <a:p>
             <a:pPr>
               <a:spcAft>
                 <a:spcPts val="800"/>
               </a:spcAft>
-              <a:defRPr sz="2000">
+              <a:defRPr sz="1500">
                 <a:solidFill>
                   <a:srgbClr val="333333"/>
                 </a:solidFill>
@@ -5639,7 +7360,7 @@
               </a:defRPr>
             </a:pPr>
             <a:r>
-              <a:t>• List comprehensions and filtering</a:t>
+              <a:t>• Terminal Unicode bar chart</a:t>
             </a:r>
           </a:p>
           <a:p>
@@ -5647,7 +7368,7 @@
               <a:spcAft>
                 <a:spcPts val="800"/>
               </a:spcAft>
-              <a:defRPr sz="2000">
+              <a:defRPr sz="1500">
                 <a:solidFill>
                   <a:srgbClr val="333333"/>
                 </a:solidFill>
@@ -5655,7 +7376,7 @@
               </a:defRPr>
             </a:pPr>
             <a:r>
-              <a:t>• Sorting with lambda functions</a:t>
+              <a:t>• Matplotlib graphical chart</a:t>
             </a:r>
           </a:p>
           <a:p>
@@ -5663,7 +7384,7 @@
               <a:spcAft>
                 <a:spcPts val="800"/>
               </a:spcAft>
-              <a:defRPr sz="2000">
+              <a:defRPr sz="1500">
                 <a:solidFill>
                   <a:srgbClr val="333333"/>
                 </a:solidFill>
@@ -5671,7 +7392,7 @@
               </a:defRPr>
             </a:pPr>
             <a:r>
-              <a:t>• Importing and using external libraries</a:t>
+              <a:t>• generate_palette()</a:t>
             </a:r>
           </a:p>
           <a:p>
@@ -5679,7 +7400,7 @@
               <a:spcAft>
                 <a:spcPts val="800"/>
               </a:spcAft>
-              <a:defRPr sz="2000">
+              <a:defRPr sz="1500">
                 <a:solidFill>
                   <a:srgbClr val="333333"/>
                 </a:solidFill>
@@ -5687,7 +7408,276 @@
               </a:defRPr>
             </a:pPr>
             <a:r>
-              <a:t>• Constants and configuration patterns</a:t>
+              <a:t>• get_employee_color()</a:t>
+            </a:r>
+          </a:p>
+          <a:p>
+            <a:pPr>
+              <a:spcAft>
+                <a:spcPts val="800"/>
+              </a:spcAft>
+              <a:defRPr sz="1500">
+                <a:solidFill>
+                  <a:srgbClr val="333333"/>
+                </a:solidFill>
+                <a:latin typeface="Calibri"/>
+              </a:defRPr>
+            </a:pPr>
+            <a:r>
+              <a:t>• Dept-based color schemes</a:t>
+            </a:r>
+          </a:p>
+        </p:txBody>
+      </p:sp>
+      <p:sp>
+        <p:nvSpPr>
+          <p:cNvPr id="12" name="Rounded Rectangle 11"/>
+          <p:cNvSpPr/>
+          <p:nvPr/>
+        </p:nvSpPr>
+        <p:spPr>
+          <a:xfrm>
+            <a:off x="8229600" y="1463040"/>
+            <a:ext cx="3474720" cy="4754880"/>
+          </a:xfrm>
+          <a:prstGeom prst="roundRect">
+            <a:avLst/>
+          </a:prstGeom>
+          <a:solidFill>
+            <a:srgbClr val="E8F0FE"/>
+          </a:solidFill>
+          <a:ln w="19050">
+            <a:solidFill>
+              <a:srgbClr val="1A56DB"/>
+            </a:solidFill>
+          </a:ln>
+        </p:spPr>
+        <p:style>
+          <a:lnRef idx="1">
+            <a:schemeClr val="accent1"/>
+          </a:lnRef>
+          <a:fillRef idx="3">
+            <a:schemeClr val="accent1"/>
+          </a:fillRef>
+          <a:effectRef idx="2">
+            <a:schemeClr val="accent1"/>
+          </a:effectRef>
+          <a:fontRef idx="minor">
+            <a:schemeClr val="lt1"/>
+          </a:fontRef>
+        </p:style>
+        <p:txBody>
+          <a:bodyPr rtlCol="0" anchor="ctr"/>
+          <a:lstStyle/>
+          <a:p>
+            <a:pPr algn="ctr"/>
+          </a:p>
+        </p:txBody>
+      </p:sp>
+      <p:sp>
+        <p:nvSpPr>
+          <p:cNvPr id="13" name="Oval 12"/>
+          <p:cNvSpPr/>
+          <p:nvPr/>
+        </p:nvSpPr>
+        <p:spPr>
+          <a:xfrm>
+            <a:off x="8595360" y="1737360"/>
+            <a:ext cx="502920" cy="502920"/>
+          </a:xfrm>
+          <a:prstGeom prst="ellipse">
+            <a:avLst/>
+          </a:prstGeom>
+          <a:solidFill>
+            <a:srgbClr val="1A56DB"/>
+          </a:solidFill>
+          <a:ln>
+            <a:noFill/>
+          </a:ln>
+        </p:spPr>
+        <p:style>
+          <a:lnRef idx="1">
+            <a:schemeClr val="accent1"/>
+          </a:lnRef>
+          <a:fillRef idx="3">
+            <a:schemeClr val="accent1"/>
+          </a:fillRef>
+          <a:effectRef idx="2">
+            <a:schemeClr val="accent1"/>
+          </a:effectRef>
+          <a:fontRef idx="minor">
+            <a:schemeClr val="lt1"/>
+          </a:fontRef>
+        </p:style>
+        <p:txBody>
+          <a:bodyPr rtlCol="0" anchor="ctr" wrap="none"/>
+          <a:lstStyle/>
+          <a:p>
+            <a:pPr algn="ctr">
+              <a:defRPr sz="600" b="1">
+                <a:solidFill>
+                  <a:srgbClr val="FFFFFF"/>
+                </a:solidFill>
+                <a:latin typeface="Calibri"/>
+              </a:defRPr>
+            </a:pPr>
+            <a:r>
+              <a:t>UI</a:t>
+            </a:r>
+          </a:p>
+        </p:txBody>
+      </p:sp>
+      <p:sp>
+        <p:nvSpPr>
+          <p:cNvPr id="14" name="TextBox 13"/>
+          <p:cNvSpPr txBox="1"/>
+          <p:nvPr/>
+        </p:nvSpPr>
+        <p:spPr>
+          <a:xfrm>
+            <a:off x="9235440" y="1783080"/>
+            <a:ext cx="2286000" cy="457200"/>
+          </a:xfrm>
+          <a:prstGeom prst="rect">
+            <a:avLst/>
+          </a:prstGeom>
+          <a:noFill/>
+        </p:spPr>
+        <p:txBody>
+          <a:bodyPr wrap="square">
+            <a:spAutoFit/>
+          </a:bodyPr>
+          <a:lstStyle/>
+          <a:p>
+            <a:pPr algn="l">
+              <a:defRPr sz="1800" b="1">
+                <a:solidFill>
+                  <a:srgbClr val="1A56DB"/>
+                </a:solidFill>
+                <a:latin typeface="Calibri"/>
+              </a:defRPr>
+            </a:pPr>
+            <a:r>
+              <a:t>main app</a:t>
+            </a:r>
+          </a:p>
+        </p:txBody>
+      </p:sp>
+      <p:sp>
+        <p:nvSpPr>
+          <p:cNvPr id="15" name="TextBox 14"/>
+          <p:cNvSpPr txBox="1"/>
+          <p:nvPr/>
+        </p:nvSpPr>
+        <p:spPr>
+          <a:xfrm>
+            <a:off x="8503920" y="2468880"/>
+            <a:ext cx="3017520" cy="3657600"/>
+          </a:xfrm>
+          <a:prstGeom prst="rect">
+            <a:avLst/>
+          </a:prstGeom>
+          <a:noFill/>
+        </p:spPr>
+        <p:txBody>
+          <a:bodyPr wrap="square">
+            <a:spAutoFit/>
+          </a:bodyPr>
+          <a:lstStyle/>
+          <a:p>
+            <a:pPr>
+              <a:spcAft>
+                <a:spcPts val="800"/>
+              </a:spcAft>
+              <a:defRPr sz="1500">
+                <a:solidFill>
+                  <a:srgbClr val="333333"/>
+                </a:solidFill>
+                <a:latin typeface="Calibri"/>
+              </a:defRPr>
+            </a:pPr>
+            <a:r>
+              <a:t>• CLI menu loop</a:t>
+            </a:r>
+          </a:p>
+          <a:p>
+            <a:pPr>
+              <a:spcAft>
+                <a:spcPts val="800"/>
+              </a:spcAft>
+              <a:defRPr sz="1500">
+                <a:solidFill>
+                  <a:srgbClr val="333333"/>
+                </a:solidFill>
+                <a:latin typeface="Calibri"/>
+              </a:defRPr>
+            </a:pPr>
+            <a:r>
+              <a:t>• User input handling</a:t>
+            </a:r>
+          </a:p>
+          <a:p>
+            <a:pPr>
+              <a:spcAft>
+                <a:spcPts val="800"/>
+              </a:spcAft>
+              <a:defRPr sz="1500">
+                <a:solidFill>
+                  <a:srgbClr val="333333"/>
+                </a:solidFill>
+                <a:latin typeface="Calibri"/>
+              </a:defRPr>
+            </a:pPr>
+            <a:r>
+              <a:t>• display_records()</a:t>
+            </a:r>
+          </a:p>
+          <a:p>
+            <a:pPr>
+              <a:spcAft>
+                <a:spcPts val="800"/>
+              </a:spcAft>
+              <a:defRPr sz="1500">
+                <a:solidFill>
+                  <a:srgbClr val="333333"/>
+                </a:solidFill>
+                <a:latin typeface="Calibri"/>
+              </a:defRPr>
+            </a:pPr>
+            <a:r>
+              <a:t>• view_all / view_by_dept</a:t>
+            </a:r>
+          </a:p>
+          <a:p>
+            <a:pPr>
+              <a:spcAft>
+                <a:spcPts val="800"/>
+              </a:spcAft>
+              <a:defRPr sz="1500">
+                <a:solidFill>
+                  <a:srgbClr val="333333"/>
+                </a:solidFill>
+                <a:latin typeface="Calibri"/>
+              </a:defRPr>
+            </a:pPr>
+            <a:r>
+              <a:t>• create / update / delete</a:t>
+            </a:r>
+          </a:p>
+          <a:p>
+            <a:pPr>
+              <a:spcAft>
+                <a:spcPts val="800"/>
+              </a:spcAft>
+              <a:defRPr sz="1500">
+                <a:solidFill>
+                  <a:srgbClr val="333333"/>
+                </a:solidFill>
+                <a:latin typeface="Calibri"/>
+              </a:defRPr>
+            </a:pPr>
+            <a:r>
+              <a:t>• search_employee</a:t>
             </a:r>
           </a:p>
         </p:txBody>
@@ -5749,21 +7739,64 @@
               </a:defRPr>
             </a:pPr>
             <a:r>
-              <a:t>Validation Rules</a:t>
-            </a:r>
-          </a:p>
-        </p:txBody>
-      </p:sp>
-      <p:sp>
-        <p:nvSpPr>
-          <p:cNvPr id="3" name="TextBox 2"/>
+              <a:t>Key Python Concepts</a:t>
+            </a:r>
+          </a:p>
+        </p:txBody>
+      </p:sp>
+      <p:sp>
+        <p:nvSpPr>
+          <p:cNvPr id="3" name="Rectangle 2"/>
+          <p:cNvSpPr/>
+          <p:nvPr/>
+        </p:nvSpPr>
+        <p:spPr>
+          <a:xfrm>
+            <a:off x="731520" y="1097280"/>
+            <a:ext cx="3200400" cy="38100"/>
+          </a:xfrm>
+          <a:prstGeom prst="rect">
+            <a:avLst/>
+          </a:prstGeom>
+          <a:solidFill>
+            <a:srgbClr val="1A56DB"/>
+          </a:solidFill>
+          <a:ln>
+            <a:noFill/>
+          </a:ln>
+        </p:spPr>
+        <p:style>
+          <a:lnRef idx="1">
+            <a:schemeClr val="accent1"/>
+          </a:lnRef>
+          <a:fillRef idx="3">
+            <a:schemeClr val="accent1"/>
+          </a:fillRef>
+          <a:effectRef idx="2">
+            <a:schemeClr val="accent1"/>
+          </a:effectRef>
+          <a:fontRef idx="minor">
+            <a:schemeClr val="lt1"/>
+          </a:fontRef>
+        </p:style>
+        <p:txBody>
+          <a:bodyPr rtlCol="0" anchor="ctr"/>
+          <a:lstStyle/>
+          <a:p>
+            <a:pPr algn="ctr"/>
+          </a:p>
+        </p:txBody>
+      </p:sp>
+      <p:sp>
+        <p:nvSpPr>
+          <p:cNvPr id="4" name="TextBox 3"/>
           <p:cNvSpPr txBox="1"/>
           <p:nvPr/>
         </p:nvSpPr>
         <p:spPr>
           <a:xfrm>
             <a:off x="731520" y="1645920"/>
-            <a:ext cx="10058400" cy="4114800"/>
+            <a:ext cx="5029200" cy="4572000"/>
           </a:xfrm>
           <a:prstGeom prst="rect">
             <a:avLst/>
@@ -5788,7 +7821,7 @@
               </a:defRPr>
             </a:pPr>
             <a:r>
-              <a:t>• Username must be alphanumeric only (no spaces or special characters)</a:t>
+              <a:t>• Lists, dictionaries, SQL queries</a:t>
             </a:r>
           </a:p>
           <a:p>
@@ -5804,7 +7837,7 @@
               </a:defRPr>
             </a:pPr>
             <a:r>
-              <a:t>• Username cannot be empty</a:t>
+              <a:t>• Functions with docstrings</a:t>
             </a:r>
           </a:p>
           <a:p>
@@ -5820,7 +7853,7 @@
               </a:defRPr>
             </a:pPr>
             <a:r>
-              <a:t>• Department must match one of the 5 predefined departments</a:t>
+              <a:t>• Modular imports across files</a:t>
             </a:r>
           </a:p>
           <a:p>
@@ -5836,7 +7869,7 @@
               </a:defRPr>
             </a:pPr>
             <a:r>
-              <a:t>• No duplicate employee with same name + department (case-insensitive)</a:t>
+              <a:t>• While loops and conditionals</a:t>
             </a:r>
           </a:p>
           <a:p>
@@ -5852,9 +7885,32 @@
               </a:defRPr>
             </a:pPr>
             <a:r>
-              <a:t>• Ticket count must be a non-negative integer</a:t>
-            </a:r>
-          </a:p>
+              <a:t>• f-string formatting</a:t>
+            </a:r>
+          </a:p>
+        </p:txBody>
+      </p:sp>
+      <p:sp>
+        <p:nvSpPr>
+          <p:cNvPr id="5" name="TextBox 4"/>
+          <p:cNvSpPr txBox="1"/>
+          <p:nvPr/>
+        </p:nvSpPr>
+        <p:spPr>
+          <a:xfrm>
+            <a:off x="5943600" y="1645920"/>
+            <a:ext cx="5486400" cy="4572000"/>
+          </a:xfrm>
+          <a:prstGeom prst="rect">
+            <a:avLst/>
+          </a:prstGeom>
+          <a:noFill/>
+        </p:spPr>
+        <p:txBody>
+          <a:bodyPr wrap="square">
+            <a:spAutoFit/>
+          </a:bodyPr>
+          <a:lstStyle/>
           <a:p>
             <a:pPr>
               <a:spcAft>
@@ -5868,7 +7924,71 @@
               </a:defRPr>
             </a:pPr>
             <a:r>
-              <a:t>• Invalid input is caught with try/except — program never crashes</a:t>
+              <a:t>• try/except error handling</a:t>
+            </a:r>
+          </a:p>
+          <a:p>
+            <a:pPr>
+              <a:spcAft>
+                <a:spcPts val="800"/>
+              </a:spcAft>
+              <a:defRPr sz="2000">
+                <a:solidFill>
+                  <a:srgbClr val="333333"/>
+                </a:solidFill>
+                <a:latin typeface="Calibri"/>
+              </a:defRPr>
+            </a:pPr>
+            <a:r>
+              <a:t>• List comprehensions</a:t>
+            </a:r>
+          </a:p>
+          <a:p>
+            <a:pPr>
+              <a:spcAft>
+                <a:spcPts val="800"/>
+              </a:spcAft>
+              <a:defRPr sz="2000">
+                <a:solidFill>
+                  <a:srgbClr val="333333"/>
+                </a:solidFill>
+                <a:latin typeface="Calibri"/>
+              </a:defRPr>
+            </a:pPr>
+            <a:r>
+              <a:t>• Lambda sorting</a:t>
+            </a:r>
+          </a:p>
+          <a:p>
+            <a:pPr>
+              <a:spcAft>
+                <a:spcPts val="800"/>
+              </a:spcAft>
+              <a:defRPr sz="2000">
+                <a:solidFill>
+                  <a:srgbClr val="333333"/>
+                </a:solidFill>
+                <a:latin typeface="Calibri"/>
+              </a:defRPr>
+            </a:pPr>
+            <a:r>
+              <a:t>• SQLite parameterized queries</a:t>
+            </a:r>
+          </a:p>
+          <a:p>
+            <a:pPr>
+              <a:spcAft>
+                <a:spcPts val="800"/>
+              </a:spcAft>
+              <a:defRPr sz="2000">
+                <a:solidFill>
+                  <a:srgbClr val="333333"/>
+                </a:solidFill>
+                <a:latin typeface="Calibri"/>
+              </a:defRPr>
+            </a:pPr>
+            <a:r>
+              <a:t>• Context management (try/finally)</a:t>
             </a:r>
           </a:p>
         </p:txBody>
@@ -5930,35 +8050,173 @@
               </a:defRPr>
             </a:pPr>
             <a:r>
-              <a:t>Demo — Main Menu</a:t>
-            </a:r>
-          </a:p>
-        </p:txBody>
-      </p:sp>
-      <p:pic>
-        <p:nvPicPr>
-          <p:cNvPr id="3" name="Picture 2" descr="Screenshot 2026-04-20 at 00.23.23.png"/>
-          <p:cNvPicPr>
-            <a:picLocks noChangeAspect="1"/>
-          </p:cNvPicPr>
-          <p:nvPr/>
-        </p:nvPicPr>
-        <p:blipFill>
-          <a:blip r:embed="rId2"/>
-          <a:stretch>
-            <a:fillRect/>
-          </a:stretch>
-        </p:blipFill>
-        <p:spPr>
-          <a:xfrm>
-            <a:off x="1371600" y="1463040"/>
-            <a:ext cx="9418320" cy="5029200"/>
+              <a:t>Validation Rules</a:t>
+            </a:r>
+          </a:p>
+        </p:txBody>
+      </p:sp>
+      <p:sp>
+        <p:nvSpPr>
+          <p:cNvPr id="3" name="Rectangle 2"/>
+          <p:cNvSpPr/>
+          <p:nvPr/>
+        </p:nvSpPr>
+        <p:spPr>
+          <a:xfrm>
+            <a:off x="731520" y="1097280"/>
+            <a:ext cx="2560320" cy="38100"/>
           </a:xfrm>
           <a:prstGeom prst="rect">
             <a:avLst/>
           </a:prstGeom>
-        </p:spPr>
-      </p:pic>
+          <a:solidFill>
+            <a:srgbClr val="1A56DB"/>
+          </a:solidFill>
+          <a:ln>
+            <a:noFill/>
+          </a:ln>
+        </p:spPr>
+        <p:style>
+          <a:lnRef idx="1">
+            <a:schemeClr val="accent1"/>
+          </a:lnRef>
+          <a:fillRef idx="3">
+            <a:schemeClr val="accent1"/>
+          </a:fillRef>
+          <a:effectRef idx="2">
+            <a:schemeClr val="accent1"/>
+          </a:effectRef>
+          <a:fontRef idx="minor">
+            <a:schemeClr val="lt1"/>
+          </a:fontRef>
+        </p:style>
+        <p:txBody>
+          <a:bodyPr rtlCol="0" anchor="ctr"/>
+          <a:lstStyle/>
+          <a:p>
+            <a:pPr algn="ctr"/>
+          </a:p>
+        </p:txBody>
+      </p:sp>
+      <p:sp>
+        <p:nvSpPr>
+          <p:cNvPr id="4" name="TextBox 3"/>
+          <p:cNvSpPr txBox="1"/>
+          <p:nvPr/>
+        </p:nvSpPr>
+        <p:spPr>
+          <a:xfrm>
+            <a:off x="731520" y="1645920"/>
+            <a:ext cx="10058400" cy="4114800"/>
+          </a:xfrm>
+          <a:prstGeom prst="rect">
+            <a:avLst/>
+          </a:prstGeom>
+          <a:noFill/>
+        </p:spPr>
+        <p:txBody>
+          <a:bodyPr wrap="square">
+            <a:spAutoFit/>
+          </a:bodyPr>
+          <a:lstStyle/>
+          <a:p>
+            <a:pPr>
+              <a:spcAft>
+                <a:spcPts val="800"/>
+              </a:spcAft>
+              <a:defRPr sz="2000">
+                <a:solidFill>
+                  <a:srgbClr val="333333"/>
+                </a:solidFill>
+                <a:latin typeface="Calibri"/>
+              </a:defRPr>
+            </a:pPr>
+            <a:r>
+              <a:t>• Alphanumeric usernames only</a:t>
+            </a:r>
+          </a:p>
+          <a:p>
+            <a:pPr>
+              <a:spcAft>
+                <a:spcPts val="800"/>
+              </a:spcAft>
+              <a:defRPr sz="2000">
+                <a:solidFill>
+                  <a:srgbClr val="333333"/>
+                </a:solidFill>
+                <a:latin typeface="Calibri"/>
+              </a:defRPr>
+            </a:pPr>
+            <a:r>
+              <a:t>• Non-empty username required</a:t>
+            </a:r>
+          </a:p>
+          <a:p>
+            <a:pPr>
+              <a:spcAft>
+                <a:spcPts val="800"/>
+              </a:spcAft>
+              <a:defRPr sz="2000">
+                <a:solidFill>
+                  <a:srgbClr val="333333"/>
+                </a:solidFill>
+                <a:latin typeface="Calibri"/>
+              </a:defRPr>
+            </a:pPr>
+            <a:r>
+              <a:t>• Department must match predefined list</a:t>
+            </a:r>
+          </a:p>
+          <a:p>
+            <a:pPr>
+              <a:spcAft>
+                <a:spcPts val="800"/>
+              </a:spcAft>
+              <a:defRPr sz="2000">
+                <a:solidFill>
+                  <a:srgbClr val="333333"/>
+                </a:solidFill>
+                <a:latin typeface="Calibri"/>
+              </a:defRPr>
+            </a:pPr>
+            <a:r>
+              <a:t>• No duplicate name + department</a:t>
+            </a:r>
+          </a:p>
+          <a:p>
+            <a:pPr>
+              <a:spcAft>
+                <a:spcPts val="800"/>
+              </a:spcAft>
+              <a:defRPr sz="2000">
+                <a:solidFill>
+                  <a:srgbClr val="333333"/>
+                </a:solidFill>
+                <a:latin typeface="Calibri"/>
+              </a:defRPr>
+            </a:pPr>
+            <a:r>
+              <a:t>• Non-negative integer tickets</a:t>
+            </a:r>
+          </a:p>
+          <a:p>
+            <a:pPr>
+              <a:spcAft>
+                <a:spcPts val="800"/>
+              </a:spcAft>
+              <a:defRPr sz="2000">
+                <a:solidFill>
+                  <a:srgbClr val="333333"/>
+                </a:solidFill>
+                <a:latin typeface="Calibri"/>
+              </a:defRPr>
+            </a:pPr>
+            <a:r>
+              <a:t>• try/except prevents crashes</a:t>
+            </a:r>
+          </a:p>
+        </p:txBody>
+      </p:sp>
     </p:spTree>
   </p:cSld>
   <p:clrMapOvr>
@@ -6016,14 +8274,57 @@
               </a:defRPr>
             </a:pPr>
             <a:r>
-              <a:t>Demo — Search by Name</a:t>
-            </a:r>
+              <a:t>Demo — Main Menu</a:t>
+            </a:r>
+          </a:p>
+        </p:txBody>
+      </p:sp>
+      <p:sp>
+        <p:nvSpPr>
+          <p:cNvPr id="3" name="Rectangle 2"/>
+          <p:cNvSpPr/>
+          <p:nvPr/>
+        </p:nvSpPr>
+        <p:spPr>
+          <a:xfrm>
+            <a:off x="731520" y="1097280"/>
+            <a:ext cx="2286000" cy="38100"/>
+          </a:xfrm>
+          <a:prstGeom prst="rect">
+            <a:avLst/>
+          </a:prstGeom>
+          <a:solidFill>
+            <a:srgbClr val="1A56DB"/>
+          </a:solidFill>
+          <a:ln>
+            <a:noFill/>
+          </a:ln>
+        </p:spPr>
+        <p:style>
+          <a:lnRef idx="1">
+            <a:schemeClr val="accent1"/>
+          </a:lnRef>
+          <a:fillRef idx="3">
+            <a:schemeClr val="accent1"/>
+          </a:fillRef>
+          <a:effectRef idx="2">
+            <a:schemeClr val="accent1"/>
+          </a:effectRef>
+          <a:fontRef idx="minor">
+            <a:schemeClr val="lt1"/>
+          </a:fontRef>
+        </p:style>
+        <p:txBody>
+          <a:bodyPr rtlCol="0" anchor="ctr"/>
+          <a:lstStyle/>
+          <a:p>
+            <a:pPr algn="ctr"/>
           </a:p>
         </p:txBody>
       </p:sp>
       <p:pic>
         <p:nvPicPr>
-          <p:cNvPr id="3" name="Picture 2" descr="Screenshot 2026-04-20 at 00.25.17.png"/>
+          <p:cNvPr id="4" name="Picture 3" descr="Screenshot 2026-04-20 at 00.23.23.png"/>
           <p:cNvPicPr>
             <a:picLocks noChangeAspect="1"/>
           </p:cNvPicPr>
